--- a/project_14_fake_news_detection/presentations/project_presentation.pptx
+++ b/project_14_fake_news_detection/presentations/project_presentation.pptx
@@ -13,6 +13,13 @@
     <p:sldId id="261" r:id="rId12"/>
     <p:sldId id="262" r:id="rId13"/>
     <p:sldId id="263" r:id="rId14"/>
+    <p:sldId id="264" r:id="rId15"/>
+    <p:sldId id="265" r:id="rId16"/>
+    <p:sldId id="266" r:id="rId17"/>
+    <p:sldId id="267" r:id="rId18"/>
+    <p:sldId id="268" r:id="rId19"/>
+    <p:sldId id="269" r:id="rId20"/>
+    <p:sldId id="270" r:id="rId21"/>
   </p:sldIdLst>
   <p:sldSz cx="12191695" cy="6858000" type="screen4x3"/>
   <p:notesSz cx="6858000" cy="9144000"/>
@@ -3110,7 +3117,7 @@
             <a:avLst/>
           </a:prstGeom>
           <a:solidFill>
-            <a:srgbClr val="0F172A"/>
+            <a:srgbClr val="090D16"/>
           </a:solidFill>
           <a:ln>
             <a:noFill/>
@@ -3146,8 +3153,8 @@
         </p:nvSpPr>
         <p:spPr>
           <a:xfrm>
-            <a:off x="1097280" y="1645920"/>
-            <a:ext cx="10058400" cy="3474720"/>
+            <a:off x="914400" y="1645920"/>
+            <a:ext cx="10362895" cy="3474720"/>
           </a:xfrm>
           <a:prstGeom prst="rect">
             <a:avLst/>
@@ -3161,44 +3168,2383 @@
           <a:lstStyle/>
           <a:p>
             <a:pPr>
-              <a:defRPr sz="1400" b="1">
-                <a:solidFill>
-                  <a:srgbClr val="38BDF8"/>
-                </a:solidFill>
-              </a:defRPr>
-            </a:pPr>
-            <a:r>
-              <a:t>PROJECT 14 OF 55  •  RESEARCH &amp; IMPLEMENTATION DECK</a:t>
-            </a:r>
-          </a:p>
-          <a:p>
-            <a:pPr>
-              <a:spcBef>
-                <a:spcPts val="1400"/>
-              </a:spcBef>
-              <a:defRPr sz="3200" b="1">
-                <a:solidFill>
-                  <a:srgbClr val="FFFFFF"/>
-                </a:solidFill>
-              </a:defRPr>
-            </a:pPr>
-            <a:r>
-              <a:t>Fake News Detection using Deep learning</a:t>
-            </a:r>
-          </a:p>
-          <a:p>
-            <a:pPr>
-              <a:spcBef>
-                <a:spcPts val="1200"/>
-              </a:spcBef>
+              <a:defRPr sz="1300" b="1">
+                <a:solidFill>
+                  <a:srgbClr val="6366F1"/>
+                </a:solidFill>
+              </a:defRPr>
+            </a:pPr>
+            <a:r>
+              <a:t>PROJECT 14 OF 55 • NATURAL LANGUAGE PROCESSING &amp; EXPLAINABLE AI</a:t>
+            </a:r>
+          </a:p>
+          <a:p>
+            <a:pPr>
+              <a:defRPr sz="3000" b="1">
+                <a:solidFill>
+                  <a:srgbClr val="F8FAFC"/>
+                </a:solidFill>
+              </a:defRPr>
+            </a:pPr>
+            <a:r>
+              <a:t>Explainable Fake News Detection via Stylometry &amp; Passive-Aggressive Hyperplane Learning</a:t>
+            </a:r>
+          </a:p>
+          <a:p>
+            <a:pPr>
               <a:defRPr sz="1600">
                 <a:solidFill>
-                  <a:srgbClr val="CBD5E1"/>
-                </a:solidFill>
-              </a:defRPr>
-            </a:pPr>
-            <a:r>
-              <a:t>Enterprise-Grade AI Architecture, Machine Learning Pipeline &amp; Deployment Framework</a:t>
+                  <a:srgbClr val="10B981"/>
+                </a:solidFill>
+              </a:defRPr>
+            </a:pPr>
+            <a:r>
+              <a:t>High-Throughput Linguistic Attribution, Source-Agnostic Stylometry &amp; Calibrated Decision Probability</a:t>
+            </a:r>
+          </a:p>
+          <a:p>
+            <a:br/>
+            <a:pPr>
+              <a:defRPr sz="1300">
+                <a:solidFill>
+                  <a:srgbClr val="94A3B8"/>
+                </a:solidFill>
+              </a:defRPr>
+            </a:pPr>
+            <a:r>
+              <a:t>Academic Capstone Submission • Final Year Engineering Defense • Port 5014</a:t>
+            </a:r>
+            <a:br/>
+            <a:r>
+              <a:t>Full-Stack Flask Architecture • 146,627 Vocabulary Dimensions • SQLite VeriNews Persistence</a:t>
+            </a:r>
+          </a:p>
+        </p:txBody>
+      </p:sp>
+    </p:spTree>
+  </p:cSld>
+  <p:clrMapOvr>
+    <a:masterClrMapping/>
+  </p:clrMapOvr>
+</p:sld>
+</file>
+
+<file path=ppt/slides/slide10.xml><?xml version="1.0" encoding="utf-8"?>
+<p:sld xmlns:a="http://schemas.openxmlformats.org/drawingml/2006/main" xmlns:p="http://schemas.openxmlformats.org/presentationml/2006/main" xmlns:r="http://schemas.openxmlformats.org/officeDocument/2006/relationships">
+  <p:cSld>
+    <p:spTree>
+      <p:nvGrpSpPr>
+        <p:cNvPr id="1" name=""/>
+        <p:cNvGrpSpPr/>
+        <p:nvPr/>
+      </p:nvGrpSpPr>
+      <p:grpSpPr/>
+      <p:sp>
+        <p:nvSpPr>
+          <p:cNvPr id="2" name="Rectangle 1"/>
+          <p:cNvSpPr/>
+          <p:nvPr/>
+        </p:nvSpPr>
+        <p:spPr>
+          <a:xfrm>
+            <a:off x="0" y="0"/>
+            <a:ext cx="12191695" cy="6858000"/>
+          </a:xfrm>
+          <a:prstGeom prst="rect">
+            <a:avLst/>
+          </a:prstGeom>
+          <a:solidFill>
+            <a:srgbClr val="090D16"/>
+          </a:solidFill>
+          <a:ln>
+            <a:noFill/>
+          </a:ln>
+        </p:spPr>
+        <p:style>
+          <a:lnRef idx="1">
+            <a:schemeClr val="accent1"/>
+          </a:lnRef>
+          <a:fillRef idx="3">
+            <a:schemeClr val="accent1"/>
+          </a:fillRef>
+          <a:effectRef idx="2">
+            <a:schemeClr val="accent1"/>
+          </a:effectRef>
+          <a:fontRef idx="minor">
+            <a:schemeClr val="lt1"/>
+          </a:fontRef>
+        </p:style>
+        <p:txBody>
+          <a:bodyPr rtlCol="0" anchor="ctr"/>
+          <a:lstStyle/>
+          <a:p>
+            <a:pPr algn="ctr"/>
+          </a:p>
+        </p:txBody>
+      </p:sp>
+      <p:sp>
+        <p:nvSpPr>
+          <p:cNvPr id="3" name="TextBox 2"/>
+          <p:cNvSpPr txBox="1"/>
+          <p:nvPr/>
+        </p:nvSpPr>
+        <p:spPr>
+          <a:xfrm>
+            <a:off x="731520" y="365760"/>
+            <a:ext cx="10728655" cy="1005840"/>
+          </a:xfrm>
+          <a:prstGeom prst="rect">
+            <a:avLst/>
+          </a:prstGeom>
+          <a:noFill/>
+        </p:spPr>
+        <p:txBody>
+          <a:bodyPr wrap="square">
+            <a:spAutoFit/>
+          </a:bodyPr>
+          <a:lstStyle/>
+          <a:p>
+            <a:pPr>
+              <a:defRPr sz="1100" b="1">
+                <a:solidFill>
+                  <a:srgbClr val="6366F1"/>
+                </a:solidFill>
+              </a:defRPr>
+            </a:pPr>
+            <a:r>
+              <a:t>SYSTEM VERIFICATION &amp; LIVE TELEMETRY • SLIDE 10</a:t>
+            </a:r>
+          </a:p>
+          <a:p>
+            <a:pPr>
+              <a:defRPr sz="2200" b="1">
+                <a:solidFill>
+                  <a:srgbClr val="F8FAFC"/>
+                </a:solidFill>
+              </a:defRPr>
+            </a:pPr>
+            <a:r>
+              <a:t>Live UI: High-Risk Fake News Classification &amp; Probability Gauge</a:t>
+            </a:r>
+          </a:p>
+        </p:txBody>
+      </p:sp>
+      <p:pic>
+        <p:nvPicPr>
+          <p:cNvPr id="4" name="Picture 3" descr="03_sensational_fake_detection.png"/>
+          <p:cNvPicPr>
+            <a:picLocks noChangeAspect="1"/>
+          </p:cNvPicPr>
+          <p:nvPr/>
+        </p:nvPicPr>
+        <p:blipFill>
+          <a:blip r:embed="rId2"/>
+          <a:stretch>
+            <a:fillRect/>
+          </a:stretch>
+        </p:blipFill>
+        <p:spPr>
+          <a:xfrm>
+            <a:off x="731520" y="1645920"/>
+            <a:ext cx="6949440" cy="4389120"/>
+          </a:xfrm>
+          <a:prstGeom prst="rect">
+            <a:avLst/>
+          </a:prstGeom>
+        </p:spPr>
+      </p:pic>
+      <p:sp>
+        <p:nvSpPr>
+          <p:cNvPr id="5" name="Rounded Rectangle 4"/>
+          <p:cNvSpPr/>
+          <p:nvPr/>
+        </p:nvSpPr>
+        <p:spPr>
+          <a:xfrm>
+            <a:off x="7955279" y="1645920"/>
+            <a:ext cx="3474720" cy="4389120"/>
+          </a:xfrm>
+          <a:prstGeom prst="roundRect">
+            <a:avLst/>
+          </a:prstGeom>
+          <a:solidFill>
+            <a:srgbClr val="111827"/>
+          </a:solidFill>
+          <a:ln w="19050">
+            <a:solidFill>
+              <a:srgbClr val="6366F1"/>
+            </a:solidFill>
+          </a:ln>
+        </p:spPr>
+        <p:style>
+          <a:lnRef idx="1">
+            <a:schemeClr val="accent1"/>
+          </a:lnRef>
+          <a:fillRef idx="3">
+            <a:schemeClr val="accent1"/>
+          </a:fillRef>
+          <a:effectRef idx="2">
+            <a:schemeClr val="accent1"/>
+          </a:effectRef>
+          <a:fontRef idx="minor">
+            <a:schemeClr val="lt1"/>
+          </a:fontRef>
+        </p:style>
+        <p:txBody>
+          <a:bodyPr rtlCol="0" anchor="ctr" wrap="square"/>
+          <a:lstStyle/>
+          <a:p>
+            <a:pPr algn="ctr">
+              <a:defRPr sz="1500" b="1">
+                <a:solidFill>
+                  <a:srgbClr val="6366F1"/>
+                </a:solidFill>
+              </a:defRPr>
+            </a:pPr>
+            <a:r>
+              <a:t>Flagged Misinformation</a:t>
+            </a:r>
+          </a:p>
+          <a:p>
+            <a:pPr>
+              <a:defRPr sz="1100">
+                <a:solidFill>
+                  <a:srgbClr val="94A3B8"/>
+                </a:solidFill>
+              </a:defRPr>
+            </a:pPr>
+            <a:r>
+              <a:t>• Clear crimson glowing verdict banner: 'Looking Fake News - Flagged as Unreliable Content'.</a:t>
+            </a:r>
+          </a:p>
+          <a:p>
+            <a:pPr>
+              <a:defRPr sz="1100">
+                <a:solidFill>
+                  <a:srgbClr val="94A3B8"/>
+                </a:solidFill>
+              </a:defRPr>
+            </a:pPr>
+            <a:r>
+              <a:t>• Dual probability meter shows 88.5% Fake vs 11.5% Real credibility.</a:t>
+            </a:r>
+          </a:p>
+          <a:p>
+            <a:pPr>
+              <a:defRPr sz="1100">
+                <a:solidFill>
+                  <a:srgbClr val="94A3B8"/>
+                </a:solidFill>
+              </a:defRPr>
+            </a:pPr>
+            <a:r>
+              <a:t>• Calculated decision score d = +2.04 with Severe Misinformation Risk tier.</a:t>
+            </a:r>
+          </a:p>
+          <a:p>
+            <a:pPr>
+              <a:defRPr sz="1100">
+                <a:solidFill>
+                  <a:srgbClr val="94A3B8"/>
+                </a:solidFill>
+              </a:defRPr>
+            </a:pPr>
+            <a:r>
+              <a:t>• Dynamic badges provide immediate, non-technical clarity for end-users.</a:t>
+            </a:r>
+          </a:p>
+        </p:txBody>
+      </p:sp>
+    </p:spTree>
+  </p:cSld>
+  <p:clrMapOvr>
+    <a:masterClrMapping/>
+  </p:clrMapOvr>
+</p:sld>
+</file>
+
+<file path=ppt/slides/slide11.xml><?xml version="1.0" encoding="utf-8"?>
+<p:sld xmlns:a="http://schemas.openxmlformats.org/drawingml/2006/main" xmlns:p="http://schemas.openxmlformats.org/presentationml/2006/main" xmlns:r="http://schemas.openxmlformats.org/officeDocument/2006/relationships">
+  <p:cSld>
+    <p:spTree>
+      <p:nvGrpSpPr>
+        <p:cNvPr id="1" name=""/>
+        <p:cNvGrpSpPr/>
+        <p:nvPr/>
+      </p:nvGrpSpPr>
+      <p:grpSpPr/>
+      <p:sp>
+        <p:nvSpPr>
+          <p:cNvPr id="2" name="Rectangle 1"/>
+          <p:cNvSpPr/>
+          <p:nvPr/>
+        </p:nvSpPr>
+        <p:spPr>
+          <a:xfrm>
+            <a:off x="0" y="0"/>
+            <a:ext cx="12191695" cy="6858000"/>
+          </a:xfrm>
+          <a:prstGeom prst="rect">
+            <a:avLst/>
+          </a:prstGeom>
+          <a:solidFill>
+            <a:srgbClr val="090D16"/>
+          </a:solidFill>
+          <a:ln>
+            <a:noFill/>
+          </a:ln>
+        </p:spPr>
+        <p:style>
+          <a:lnRef idx="1">
+            <a:schemeClr val="accent1"/>
+          </a:lnRef>
+          <a:fillRef idx="3">
+            <a:schemeClr val="accent1"/>
+          </a:fillRef>
+          <a:effectRef idx="2">
+            <a:schemeClr val="accent1"/>
+          </a:effectRef>
+          <a:fontRef idx="minor">
+            <a:schemeClr val="lt1"/>
+          </a:fontRef>
+        </p:style>
+        <p:txBody>
+          <a:bodyPr rtlCol="0" anchor="ctr"/>
+          <a:lstStyle/>
+          <a:p>
+            <a:pPr algn="ctr"/>
+          </a:p>
+        </p:txBody>
+      </p:sp>
+      <p:sp>
+        <p:nvSpPr>
+          <p:cNvPr id="3" name="TextBox 2"/>
+          <p:cNvSpPr txBox="1"/>
+          <p:nvPr/>
+        </p:nvSpPr>
+        <p:spPr>
+          <a:xfrm>
+            <a:off x="731520" y="365760"/>
+            <a:ext cx="10728655" cy="1005840"/>
+          </a:xfrm>
+          <a:prstGeom prst="rect">
+            <a:avLst/>
+          </a:prstGeom>
+          <a:noFill/>
+        </p:spPr>
+        <p:txBody>
+          <a:bodyPr wrap="square">
+            <a:spAutoFit/>
+          </a:bodyPr>
+          <a:lstStyle/>
+          <a:p>
+            <a:pPr>
+              <a:defRPr sz="1100" b="1">
+                <a:solidFill>
+                  <a:srgbClr val="6366F1"/>
+                </a:solidFill>
+              </a:defRPr>
+            </a:pPr>
+            <a:r>
+              <a:t>SYSTEM VERIFICATION &amp; LIVE TELEMETRY • SLIDE 11</a:t>
+            </a:r>
+          </a:p>
+          <a:p>
+            <a:pPr>
+              <a:defRPr sz="2200" b="1">
+                <a:solidFill>
+                  <a:srgbClr val="F8FAFC"/>
+                </a:solidFill>
+              </a:defRPr>
+            </a:pPr>
+            <a:r>
+              <a:t>Live UI: Explainable Feature Attribution &amp; Mathematical Word Weights</a:t>
+            </a:r>
+          </a:p>
+        </p:txBody>
+      </p:sp>
+      <p:pic>
+        <p:nvPicPr>
+          <p:cNvPr id="4" name="Picture 3" descr="03_sensational_fake_detection.png"/>
+          <p:cNvPicPr>
+            <a:picLocks noChangeAspect="1"/>
+          </p:cNvPicPr>
+          <p:nvPr/>
+        </p:nvPicPr>
+        <p:blipFill>
+          <a:blip r:embed="rId2"/>
+          <a:stretch>
+            <a:fillRect/>
+          </a:stretch>
+        </p:blipFill>
+        <p:spPr>
+          <a:xfrm>
+            <a:off x="731520" y="1645920"/>
+            <a:ext cx="6949440" cy="4389120"/>
+          </a:xfrm>
+          <a:prstGeom prst="rect">
+            <a:avLst/>
+          </a:prstGeom>
+        </p:spPr>
+      </p:pic>
+      <p:sp>
+        <p:nvSpPr>
+          <p:cNvPr id="5" name="Rounded Rectangle 4"/>
+          <p:cNvSpPr/>
+          <p:nvPr/>
+        </p:nvSpPr>
+        <p:spPr>
+          <a:xfrm>
+            <a:off x="7955279" y="1645920"/>
+            <a:ext cx="3474720" cy="4389120"/>
+          </a:xfrm>
+          <a:prstGeom prst="roundRect">
+            <a:avLst/>
+          </a:prstGeom>
+          <a:solidFill>
+            <a:srgbClr val="111827"/>
+          </a:solidFill>
+          <a:ln w="19050">
+            <a:solidFill>
+              <a:srgbClr val="6366F1"/>
+            </a:solidFill>
+          </a:ln>
+        </p:spPr>
+        <p:style>
+          <a:lnRef idx="1">
+            <a:schemeClr val="accent1"/>
+          </a:lnRef>
+          <a:fillRef idx="3">
+            <a:schemeClr val="accent1"/>
+          </a:fillRef>
+          <a:effectRef idx="2">
+            <a:schemeClr val="accent1"/>
+          </a:effectRef>
+          <a:fontRef idx="minor">
+            <a:schemeClr val="lt1"/>
+          </a:fontRef>
+        </p:style>
+        <p:txBody>
+          <a:bodyPr rtlCol="0" anchor="ctr" wrap="square"/>
+          <a:lstStyle/>
+          <a:p>
+            <a:pPr algn="ctr">
+              <a:defRPr sz="1500" b="1">
+                <a:solidFill>
+                  <a:srgbClr val="6366F1"/>
+                </a:solidFill>
+              </a:defRPr>
+            </a:pPr>
+            <a:r>
+              <a:t>Mathematical Transparency</a:t>
+            </a:r>
+          </a:p>
+          <a:p>
+            <a:pPr>
+              <a:defRPr sz="1100">
+                <a:solidFill>
+                  <a:srgbClr val="94A3B8"/>
+                </a:solidFill>
+              </a:defRPr>
+            </a:pPr>
+            <a:r>
+              <a:t>• Displays top swaying words with relative percentage and directional impact.</a:t>
+            </a:r>
+          </a:p>
+          <a:p>
+            <a:pPr>
+              <a:defRPr sz="1100">
+                <a:solidFill>
+                  <a:srgbClr val="94A3B8"/>
+                </a:solidFill>
+              </a:defRPr>
+            </a:pPr>
+            <a:r>
+              <a:t>• Tokens 'secret', 'revealed', and 'plan' push verdict strongly toward Fake.</a:t>
+            </a:r>
+          </a:p>
+          <a:p>
+            <a:pPr>
+              <a:defRPr sz="1100">
+                <a:solidFill>
+                  <a:srgbClr val="94A3B8"/>
+                </a:solidFill>
+              </a:defRPr>
+            </a:pPr>
+            <a:r>
+              <a:t>• Color-coded pills allow users to inspect individual token contributions.</a:t>
+            </a:r>
+          </a:p>
+          <a:p>
+            <a:pPr>
+              <a:defRPr sz="1100">
+                <a:solidFill>
+                  <a:srgbClr val="94A3B8"/>
+                </a:solidFill>
+              </a:defRPr>
+            </a:pPr>
+            <a:r>
+              <a:t>• Eliminates the black-box problem commonly found in complex deep learning.</a:t>
+            </a:r>
+          </a:p>
+        </p:txBody>
+      </p:sp>
+    </p:spTree>
+  </p:cSld>
+  <p:clrMapOvr>
+    <a:masterClrMapping/>
+  </p:clrMapOvr>
+</p:sld>
+</file>
+
+<file path=ppt/slides/slide12.xml><?xml version="1.0" encoding="utf-8"?>
+<p:sld xmlns:a="http://schemas.openxmlformats.org/drawingml/2006/main" xmlns:p="http://schemas.openxmlformats.org/presentationml/2006/main" xmlns:r="http://schemas.openxmlformats.org/officeDocument/2006/relationships">
+  <p:cSld>
+    <p:spTree>
+      <p:nvGrpSpPr>
+        <p:cNvPr id="1" name=""/>
+        <p:cNvGrpSpPr/>
+        <p:nvPr/>
+      </p:nvGrpSpPr>
+      <p:grpSpPr/>
+      <p:sp>
+        <p:nvSpPr>
+          <p:cNvPr id="2" name="Rectangle 1"/>
+          <p:cNvSpPr/>
+          <p:nvPr/>
+        </p:nvSpPr>
+        <p:spPr>
+          <a:xfrm>
+            <a:off x="0" y="0"/>
+            <a:ext cx="12191695" cy="6858000"/>
+          </a:xfrm>
+          <a:prstGeom prst="rect">
+            <a:avLst/>
+          </a:prstGeom>
+          <a:solidFill>
+            <a:srgbClr val="090D16"/>
+          </a:solidFill>
+          <a:ln>
+            <a:noFill/>
+          </a:ln>
+        </p:spPr>
+        <p:style>
+          <a:lnRef idx="1">
+            <a:schemeClr val="accent1"/>
+          </a:lnRef>
+          <a:fillRef idx="3">
+            <a:schemeClr val="accent1"/>
+          </a:fillRef>
+          <a:effectRef idx="2">
+            <a:schemeClr val="accent1"/>
+          </a:effectRef>
+          <a:fontRef idx="minor">
+            <a:schemeClr val="lt1"/>
+          </a:fontRef>
+        </p:style>
+        <p:txBody>
+          <a:bodyPr rtlCol="0" anchor="ctr"/>
+          <a:lstStyle/>
+          <a:p>
+            <a:pPr algn="ctr"/>
+          </a:p>
+        </p:txBody>
+      </p:sp>
+      <p:sp>
+        <p:nvSpPr>
+          <p:cNvPr id="3" name="TextBox 2"/>
+          <p:cNvSpPr txBox="1"/>
+          <p:nvPr/>
+        </p:nvSpPr>
+        <p:spPr>
+          <a:xfrm>
+            <a:off x="731520" y="365760"/>
+            <a:ext cx="10728655" cy="1005840"/>
+          </a:xfrm>
+          <a:prstGeom prst="rect">
+            <a:avLst/>
+          </a:prstGeom>
+          <a:noFill/>
+        </p:spPr>
+        <p:txBody>
+          <a:bodyPr wrap="square">
+            <a:spAutoFit/>
+          </a:bodyPr>
+          <a:lstStyle/>
+          <a:p>
+            <a:pPr>
+              <a:defRPr sz="1100" b="1">
+                <a:solidFill>
+                  <a:srgbClr val="6366F1"/>
+                </a:solidFill>
+              </a:defRPr>
+            </a:pPr>
+            <a:r>
+              <a:t>SYSTEM VERIFICATION &amp; LIVE TELEMETRY • SLIDE 12</a:t>
+            </a:r>
+          </a:p>
+          <a:p>
+            <a:pPr>
+              <a:defRPr sz="2200" b="1">
+                <a:solidFill>
+                  <a:srgbClr val="F8FAFC"/>
+                </a:solidFill>
+              </a:defRPr>
+            </a:pPr>
+            <a:r>
+              <a:t>Live UI: Beyond Blacklists — Pure Language Stylometry Mode</a:t>
+            </a:r>
+          </a:p>
+        </p:txBody>
+      </p:sp>
+      <p:pic>
+        <p:nvPicPr>
+          <p:cNvPr id="4" name="Picture 3" descr="06_pure_language_stylometry.png"/>
+          <p:cNvPicPr>
+            <a:picLocks noChangeAspect="1"/>
+          </p:cNvPicPr>
+          <p:nvPr/>
+        </p:nvPicPr>
+        <p:blipFill>
+          <a:blip r:embed="rId2"/>
+          <a:stretch>
+            <a:fillRect/>
+          </a:stretch>
+        </p:blipFill>
+        <p:spPr>
+          <a:xfrm>
+            <a:off x="731520" y="1645920"/>
+            <a:ext cx="6949440" cy="4389120"/>
+          </a:xfrm>
+          <a:prstGeom prst="rect">
+            <a:avLst/>
+          </a:prstGeom>
+        </p:spPr>
+      </p:pic>
+      <p:sp>
+        <p:nvSpPr>
+          <p:cNvPr id="5" name="Rounded Rectangle 4"/>
+          <p:cNvSpPr/>
+          <p:nvPr/>
+        </p:nvSpPr>
+        <p:spPr>
+          <a:xfrm>
+            <a:off x="7955279" y="1645920"/>
+            <a:ext cx="3474720" cy="4389120"/>
+          </a:xfrm>
+          <a:prstGeom prst="roundRect">
+            <a:avLst/>
+          </a:prstGeom>
+          <a:solidFill>
+            <a:srgbClr val="111827"/>
+          </a:solidFill>
+          <a:ln w="19050">
+            <a:solidFill>
+              <a:srgbClr val="6366F1"/>
+            </a:solidFill>
+          </a:ln>
+        </p:spPr>
+        <p:style>
+          <a:lnRef idx="1">
+            <a:schemeClr val="accent1"/>
+          </a:lnRef>
+          <a:fillRef idx="3">
+            <a:schemeClr val="accent1"/>
+          </a:fillRef>
+          <a:effectRef idx="2">
+            <a:schemeClr val="accent1"/>
+          </a:effectRef>
+          <a:fontRef idx="minor">
+            <a:schemeClr val="lt1"/>
+          </a:fontRef>
+        </p:style>
+        <p:txBody>
+          <a:bodyPr rtlCol="0" anchor="ctr" wrap="square"/>
+          <a:lstStyle/>
+          <a:p>
+            <a:pPr algn="ctr">
+              <a:defRPr sz="1500" b="1">
+                <a:solidFill>
+                  <a:srgbClr val="6366F1"/>
+                </a:solidFill>
+              </a:defRPr>
+            </a:pPr>
+            <a:r>
+              <a:t>Source-Agnostic Verification</a:t>
+            </a:r>
+          </a:p>
+          <a:p>
+            <a:pPr>
+              <a:defRPr sz="1100">
+                <a:solidFill>
+                  <a:srgbClr val="94A3B8"/>
+                </a:solidFill>
+              </a:defRPr>
+            </a:pPr>
+            <a:r>
+              <a:t>• Strips outlet tags ('- The New York Times') to evaluate purely intrinsic text syntax.</a:t>
+            </a:r>
+          </a:p>
+          <a:p>
+            <a:pPr>
+              <a:defRPr sz="1100">
+                <a:solidFill>
+                  <a:srgbClr val="94A3B8"/>
+                </a:solidFill>
+              </a:defRPr>
+            </a:pPr>
+            <a:r>
+              <a:t>• Demonstrates that authentic journalistic headlines remain classified as Real (85.2% Real).</a:t>
+            </a:r>
+          </a:p>
+          <a:p>
+            <a:pPr>
+              <a:defRPr sz="1100">
+                <a:solidFill>
+                  <a:srgbClr val="94A3B8"/>
+                </a:solidFill>
+              </a:defRPr>
+            </a:pPr>
+            <a:r>
+              <a:t>• Prevents malicious actors from bypassing detection by appending famous news agency names.</a:t>
+            </a:r>
+          </a:p>
+          <a:p>
+            <a:pPr>
+              <a:defRPr sz="1100">
+                <a:solidFill>
+                  <a:srgbClr val="94A3B8"/>
+                </a:solidFill>
+              </a:defRPr>
+            </a:pPr>
+            <a:r>
+              <a:t>• Emerald glowing verdict confirms high-confidence verified journalism.</a:t>
+            </a:r>
+          </a:p>
+        </p:txBody>
+      </p:sp>
+    </p:spTree>
+  </p:cSld>
+  <p:clrMapOvr>
+    <a:masterClrMapping/>
+  </p:clrMapOvr>
+</p:sld>
+</file>
+
+<file path=ppt/slides/slide13.xml><?xml version="1.0" encoding="utf-8"?>
+<p:sld xmlns:a="http://schemas.openxmlformats.org/drawingml/2006/main" xmlns:p="http://schemas.openxmlformats.org/presentationml/2006/main" xmlns:r="http://schemas.openxmlformats.org/officeDocument/2006/relationships">
+  <p:cSld>
+    <p:spTree>
+      <p:nvGrpSpPr>
+        <p:cNvPr id="1" name=""/>
+        <p:cNvGrpSpPr/>
+        <p:nvPr/>
+      </p:nvGrpSpPr>
+      <p:grpSpPr/>
+      <p:sp>
+        <p:nvSpPr>
+          <p:cNvPr id="2" name="Rectangle 1"/>
+          <p:cNvSpPr/>
+          <p:nvPr/>
+        </p:nvSpPr>
+        <p:spPr>
+          <a:xfrm>
+            <a:off x="0" y="0"/>
+            <a:ext cx="12191695" cy="6858000"/>
+          </a:xfrm>
+          <a:prstGeom prst="rect">
+            <a:avLst/>
+          </a:prstGeom>
+          <a:solidFill>
+            <a:srgbClr val="090D16"/>
+          </a:solidFill>
+          <a:ln>
+            <a:noFill/>
+          </a:ln>
+        </p:spPr>
+        <p:style>
+          <a:lnRef idx="1">
+            <a:schemeClr val="accent1"/>
+          </a:lnRef>
+          <a:fillRef idx="3">
+            <a:schemeClr val="accent1"/>
+          </a:fillRef>
+          <a:effectRef idx="2">
+            <a:schemeClr val="accent1"/>
+          </a:effectRef>
+          <a:fontRef idx="minor">
+            <a:schemeClr val="lt1"/>
+          </a:fontRef>
+        </p:style>
+        <p:txBody>
+          <a:bodyPr rtlCol="0" anchor="ctr"/>
+          <a:lstStyle/>
+          <a:p>
+            <a:pPr algn="ctr"/>
+          </a:p>
+        </p:txBody>
+      </p:sp>
+      <p:sp>
+        <p:nvSpPr>
+          <p:cNvPr id="3" name="TextBox 2"/>
+          <p:cNvSpPr txBox="1"/>
+          <p:nvPr/>
+        </p:nvSpPr>
+        <p:spPr>
+          <a:xfrm>
+            <a:off x="731520" y="365760"/>
+            <a:ext cx="10728655" cy="1005840"/>
+          </a:xfrm>
+          <a:prstGeom prst="rect">
+            <a:avLst/>
+          </a:prstGeom>
+          <a:noFill/>
+        </p:spPr>
+        <p:txBody>
+          <a:bodyPr wrap="square">
+            <a:spAutoFit/>
+          </a:bodyPr>
+          <a:lstStyle/>
+          <a:p>
+            <a:pPr>
+              <a:defRPr sz="1100" b="1">
+                <a:solidFill>
+                  <a:srgbClr val="6366F1"/>
+                </a:solidFill>
+              </a:defRPr>
+            </a:pPr>
+            <a:r>
+              <a:t>SYSTEM VERIFICATION &amp; LIVE TELEMETRY • SLIDE 13</a:t>
+            </a:r>
+          </a:p>
+          <a:p>
+            <a:pPr>
+              <a:defRPr sz="2200" b="1">
+                <a:solidFill>
+                  <a:srgbClr val="F8FAFC"/>
+                </a:solidFill>
+              </a:defRPr>
+            </a:pPr>
+            <a:r>
+              <a:t>Live UI: Multi-Model Benchmarks &amp; SQLite Verification Log</a:t>
+            </a:r>
+          </a:p>
+        </p:txBody>
+      </p:sp>
+      <p:pic>
+        <p:nvPicPr>
+          <p:cNvPr id="4" name="Picture 3" descr="06_pure_language_stylometry.png"/>
+          <p:cNvPicPr>
+            <a:picLocks noChangeAspect="1"/>
+          </p:cNvPicPr>
+          <p:nvPr/>
+        </p:nvPicPr>
+        <p:blipFill>
+          <a:blip r:embed="rId2"/>
+          <a:stretch>
+            <a:fillRect/>
+          </a:stretch>
+        </p:blipFill>
+        <p:spPr>
+          <a:xfrm>
+            <a:off x="731520" y="1645920"/>
+            <a:ext cx="6949440" cy="4389120"/>
+          </a:xfrm>
+          <a:prstGeom prst="rect">
+            <a:avLst/>
+          </a:prstGeom>
+        </p:spPr>
+      </p:pic>
+      <p:sp>
+        <p:nvSpPr>
+          <p:cNvPr id="5" name="Rounded Rectangle 4"/>
+          <p:cNvSpPr/>
+          <p:nvPr/>
+        </p:nvSpPr>
+        <p:spPr>
+          <a:xfrm>
+            <a:off x="7955279" y="1645920"/>
+            <a:ext cx="3474720" cy="4389120"/>
+          </a:xfrm>
+          <a:prstGeom prst="roundRect">
+            <a:avLst/>
+          </a:prstGeom>
+          <a:solidFill>
+            <a:srgbClr val="111827"/>
+          </a:solidFill>
+          <a:ln w="19050">
+            <a:solidFill>
+              <a:srgbClr val="6366F1"/>
+            </a:solidFill>
+          </a:ln>
+        </p:spPr>
+        <p:style>
+          <a:lnRef idx="1">
+            <a:schemeClr val="accent1"/>
+          </a:lnRef>
+          <a:fillRef idx="3">
+            <a:schemeClr val="accent1"/>
+          </a:fillRef>
+          <a:effectRef idx="2">
+            <a:schemeClr val="accent1"/>
+          </a:effectRef>
+          <a:fontRef idx="minor">
+            <a:schemeClr val="lt1"/>
+          </a:fontRef>
+        </p:style>
+        <p:txBody>
+          <a:bodyPr rtlCol="0" anchor="ctr" wrap="square"/>
+          <a:lstStyle/>
+          <a:p>
+            <a:pPr algn="ctr">
+              <a:defRPr sz="1500" b="1">
+                <a:solidFill>
+                  <a:srgbClr val="6366F1"/>
+                </a:solidFill>
+              </a:defRPr>
+            </a:pPr>
+            <a:r>
+              <a:t>Auditing &amp; Evaluation Benchmarks</a:t>
+            </a:r>
+          </a:p>
+          <a:p>
+            <a:pPr>
+              <a:defRPr sz="1100">
+                <a:solidFill>
+                  <a:srgbClr val="94A3B8"/>
+                </a:solidFill>
+              </a:defRPr>
+            </a:pPr>
+            <a:r>
+              <a:t>• Benchmark comparison table evaluating Passive-Aggressive against 4 baselines.</a:t>
+            </a:r>
+          </a:p>
+          <a:p>
+            <a:pPr>
+              <a:defRPr sz="1100">
+                <a:solidFill>
+                  <a:srgbClr val="94A3B8"/>
+                </a:solidFill>
+              </a:defRPr>
+            </a:pPr>
+            <a:r>
+              <a:t>• Persistent SQLite database (fake_news.db) records headline, scores, and timestamp.</a:t>
+            </a:r>
+          </a:p>
+          <a:p>
+            <a:pPr>
+              <a:defRPr sz="1100">
+                <a:solidFill>
+                  <a:srgbClr val="94A3B8"/>
+                </a:solidFill>
+              </a:defRPr>
+            </a:pPr>
+            <a:r>
+              <a:t>• Searchable audit log provides accountability for newsroom editorial compliance.</a:t>
+            </a:r>
+          </a:p>
+          <a:p>
+            <a:pPr>
+              <a:defRPr sz="1100">
+                <a:solidFill>
+                  <a:srgbClr val="94A3B8"/>
+                </a:solidFill>
+              </a:defRPr>
+            </a:pPr>
+            <a:r>
+              <a:t>• REST API endpoints (/api/history, /api/stats) expose data to external services.</a:t>
+            </a:r>
+          </a:p>
+        </p:txBody>
+      </p:sp>
+    </p:spTree>
+  </p:cSld>
+  <p:clrMapOvr>
+    <a:masterClrMapping/>
+  </p:clrMapOvr>
+</p:sld>
+</file>
+
+<file path=ppt/slides/slide14.xml><?xml version="1.0" encoding="utf-8"?>
+<p:sld xmlns:a="http://schemas.openxmlformats.org/drawingml/2006/main" xmlns:p="http://schemas.openxmlformats.org/presentationml/2006/main" xmlns:r="http://schemas.openxmlformats.org/officeDocument/2006/relationships">
+  <p:cSld>
+    <p:spTree>
+      <p:nvGrpSpPr>
+        <p:cNvPr id="1" name=""/>
+        <p:cNvGrpSpPr/>
+        <p:nvPr/>
+      </p:nvGrpSpPr>
+      <p:grpSpPr/>
+      <p:sp>
+        <p:nvSpPr>
+          <p:cNvPr id="2" name="Rectangle 1"/>
+          <p:cNvSpPr/>
+          <p:nvPr/>
+        </p:nvSpPr>
+        <p:spPr>
+          <a:xfrm>
+            <a:off x="0" y="0"/>
+            <a:ext cx="12191695" cy="6858000"/>
+          </a:xfrm>
+          <a:prstGeom prst="rect">
+            <a:avLst/>
+          </a:prstGeom>
+          <a:solidFill>
+            <a:srgbClr val="090D16"/>
+          </a:solidFill>
+          <a:ln>
+            <a:noFill/>
+          </a:ln>
+        </p:spPr>
+        <p:style>
+          <a:lnRef idx="1">
+            <a:schemeClr val="accent1"/>
+          </a:lnRef>
+          <a:fillRef idx="3">
+            <a:schemeClr val="accent1"/>
+          </a:fillRef>
+          <a:effectRef idx="2">
+            <a:schemeClr val="accent1"/>
+          </a:effectRef>
+          <a:fontRef idx="minor">
+            <a:schemeClr val="lt1"/>
+          </a:fontRef>
+        </p:style>
+        <p:txBody>
+          <a:bodyPr rtlCol="0" anchor="ctr"/>
+          <a:lstStyle/>
+          <a:p>
+            <a:pPr algn="ctr"/>
+          </a:p>
+        </p:txBody>
+      </p:sp>
+      <p:sp>
+        <p:nvSpPr>
+          <p:cNvPr id="3" name="TextBox 2"/>
+          <p:cNvSpPr txBox="1"/>
+          <p:nvPr/>
+        </p:nvSpPr>
+        <p:spPr>
+          <a:xfrm>
+            <a:off x="731520" y="365760"/>
+            <a:ext cx="10728655" cy="1005840"/>
+          </a:xfrm>
+          <a:prstGeom prst="rect">
+            <a:avLst/>
+          </a:prstGeom>
+          <a:noFill/>
+        </p:spPr>
+        <p:txBody>
+          <a:bodyPr wrap="square">
+            <a:spAutoFit/>
+          </a:bodyPr>
+          <a:lstStyle/>
+          <a:p>
+            <a:pPr>
+              <a:defRPr sz="1100" b="1">
+                <a:solidFill>
+                  <a:srgbClr val="6366F1"/>
+                </a:solidFill>
+              </a:defRPr>
+            </a:pPr>
+            <a:r>
+              <a:t>NLP &amp; EXPLAINABLE AI • VERIFICATION SUBSYSTEM</a:t>
+            </a:r>
+          </a:p>
+          <a:p>
+            <a:pPr>
+              <a:defRPr sz="2200" b="1">
+                <a:solidFill>
+                  <a:srgbClr val="F8FAFC"/>
+                </a:solidFill>
+              </a:defRPr>
+            </a:pPr>
+            <a:r>
+              <a:t>Experimental Results &amp; Multi-Model Comparative Evaluation</a:t>
+            </a:r>
+          </a:p>
+        </p:txBody>
+      </p:sp>
+      <p:graphicFrame>
+        <p:nvGraphicFramePr>
+          <p:cNvPr id="4" name="Table 3"/>
+          <p:cNvGraphicFramePr>
+            <a:graphicFrameLocks noGrp="1"/>
+          </p:cNvGraphicFramePr>
+          <p:nvPr/>
+        </p:nvGraphicFramePr>
+        <p:xfrm>
+          <a:off x="731520" y="1645920"/>
+          <a:ext cx="10728655" cy="4389120"/>
+        </p:xfrm>
+        <a:graphic>
+          <a:graphicData uri="http://schemas.openxmlformats.org/drawingml/2006/table">
+            <a:tbl>
+              <a:tblPr firstRow="1" bandRow="1">
+                <a:tableStyleId>{5C22544A-7EE6-4342-B048-85BDC9FD1C3A}</a:tableStyleId>
+              </a:tblPr>
+              <a:tblGrid>
+                <a:gridCol w="2286000"/>
+                <a:gridCol w="1645920"/>
+                <a:gridCol w="1645920"/>
+                <a:gridCol w="1645920"/>
+                <a:gridCol w="1645920"/>
+                <a:gridCol w="1858975"/>
+              </a:tblGrid>
+              <a:tr h="731520">
+                <a:tc>
+                  <a:txBody>
+                    <a:bodyPr/>
+                    <a:lstStyle/>
+                    <a:p>
+                      <a:pPr>
+                        <a:defRPr b="1" sz="1200">
+                          <a:solidFill>
+                            <a:srgbClr val="F8FAFC"/>
+                          </a:solidFill>
+                        </a:defRPr>
+                      </a:pPr>
+                      <a:r>
+                        <a:t>Model Architecture</a:t>
+                      </a:r>
+                    </a:p>
+                  </a:txBody>
+                  <a:tcPr>
+                    <a:solidFill>
+                      <a:srgbClr val="6366F1"/>
+                    </a:solidFill>
+                  </a:tcPr>
+                </a:tc>
+                <a:tc>
+                  <a:txBody>
+                    <a:bodyPr/>
+                    <a:lstStyle/>
+                    <a:p>
+                      <a:pPr>
+                        <a:defRPr b="1" sz="1200">
+                          <a:solidFill>
+                            <a:srgbClr val="F8FAFC"/>
+                          </a:solidFill>
+                        </a:defRPr>
+                      </a:pPr>
+                      <a:r>
+                        <a:t>Accuracy</a:t>
+                      </a:r>
+                    </a:p>
+                  </a:txBody>
+                  <a:tcPr>
+                    <a:solidFill>
+                      <a:srgbClr val="6366F1"/>
+                    </a:solidFill>
+                  </a:tcPr>
+                </a:tc>
+                <a:tc>
+                  <a:txBody>
+                    <a:bodyPr/>
+                    <a:lstStyle/>
+                    <a:p>
+                      <a:pPr>
+                        <a:defRPr b="1" sz="1200">
+                          <a:solidFill>
+                            <a:srgbClr val="F8FAFC"/>
+                          </a:solidFill>
+                        </a:defRPr>
+                      </a:pPr>
+                      <a:r>
+                        <a:t>Precision</a:t>
+                      </a:r>
+                    </a:p>
+                  </a:txBody>
+                  <a:tcPr>
+                    <a:solidFill>
+                      <a:srgbClr val="6366F1"/>
+                    </a:solidFill>
+                  </a:tcPr>
+                </a:tc>
+                <a:tc>
+                  <a:txBody>
+                    <a:bodyPr/>
+                    <a:lstStyle/>
+                    <a:p>
+                      <a:pPr>
+                        <a:defRPr b="1" sz="1200">
+                          <a:solidFill>
+                            <a:srgbClr val="F8FAFC"/>
+                          </a:solidFill>
+                        </a:defRPr>
+                      </a:pPr>
+                      <a:r>
+                        <a:t>Recall</a:t>
+                      </a:r>
+                    </a:p>
+                  </a:txBody>
+                  <a:tcPr>
+                    <a:solidFill>
+                      <a:srgbClr val="6366F1"/>
+                    </a:solidFill>
+                  </a:tcPr>
+                </a:tc>
+                <a:tc>
+                  <a:txBody>
+                    <a:bodyPr/>
+                    <a:lstStyle/>
+                    <a:p>
+                      <a:pPr>
+                        <a:defRPr b="1" sz="1200">
+                          <a:solidFill>
+                            <a:srgbClr val="F8FAFC"/>
+                          </a:solidFill>
+                        </a:defRPr>
+                      </a:pPr>
+                      <a:r>
+                        <a:t>F1-Score</a:t>
+                      </a:r>
+                    </a:p>
+                  </a:txBody>
+                  <a:tcPr>
+                    <a:solidFill>
+                      <a:srgbClr val="6366F1"/>
+                    </a:solidFill>
+                  </a:tcPr>
+                </a:tc>
+                <a:tc>
+                  <a:txBody>
+                    <a:bodyPr/>
+                    <a:lstStyle/>
+                    <a:p>
+                      <a:pPr>
+                        <a:defRPr b="1" sz="1200">
+                          <a:solidFill>
+                            <a:srgbClr val="F8FAFC"/>
+                          </a:solidFill>
+                        </a:defRPr>
+                      </a:pPr>
+                      <a:r>
+                        <a:t>Inference Latency</a:t>
+                      </a:r>
+                    </a:p>
+                  </a:txBody>
+                  <a:tcPr>
+                    <a:solidFill>
+                      <a:srgbClr val="6366F1"/>
+                    </a:solidFill>
+                  </a:tcPr>
+                </a:tc>
+              </a:tr>
+              <a:tr h="731520">
+                <a:tc>
+                  <a:txBody>
+                    <a:bodyPr/>
+                    <a:lstStyle/>
+                    <a:p>
+                      <a:pPr>
+                        <a:defRPr sz="1100">
+                          <a:solidFill>
+                            <a:srgbClr val="10B981"/>
+                          </a:solidFill>
+                        </a:defRPr>
+                      </a:pPr>
+                      <a:r>
+                        <a:t>Passive-Aggressive (Selected)</a:t>
+                      </a:r>
+                    </a:p>
+                  </a:txBody>
+                  <a:tcPr>
+                    <a:solidFill>
+                      <a:srgbClr val="111827"/>
+                    </a:solidFill>
+                  </a:tcPr>
+                </a:tc>
+                <a:tc>
+                  <a:txBody>
+                    <a:bodyPr/>
+                    <a:lstStyle/>
+                    <a:p>
+                      <a:pPr>
+                        <a:defRPr sz="1100">
+                          <a:solidFill>
+                            <a:srgbClr val="10B981"/>
+                          </a:solidFill>
+                        </a:defRPr>
+                      </a:pPr>
+                      <a:r>
+                        <a:t>96.2%</a:t>
+                      </a:r>
+                    </a:p>
+                  </a:txBody>
+                  <a:tcPr>
+                    <a:solidFill>
+                      <a:srgbClr val="111827"/>
+                    </a:solidFill>
+                  </a:tcPr>
+                </a:tc>
+                <a:tc>
+                  <a:txBody>
+                    <a:bodyPr/>
+                    <a:lstStyle/>
+                    <a:p>
+                      <a:pPr>
+                        <a:defRPr sz="1100">
+                          <a:solidFill>
+                            <a:srgbClr val="10B981"/>
+                          </a:solidFill>
+                        </a:defRPr>
+                      </a:pPr>
+                      <a:r>
+                        <a:t>96.5%</a:t>
+                      </a:r>
+                    </a:p>
+                  </a:txBody>
+                  <a:tcPr>
+                    <a:solidFill>
+                      <a:srgbClr val="111827"/>
+                    </a:solidFill>
+                  </a:tcPr>
+                </a:tc>
+                <a:tc>
+                  <a:txBody>
+                    <a:bodyPr/>
+                    <a:lstStyle/>
+                    <a:p>
+                      <a:pPr>
+                        <a:defRPr sz="1100">
+                          <a:solidFill>
+                            <a:srgbClr val="10B981"/>
+                          </a:solidFill>
+                        </a:defRPr>
+                      </a:pPr>
+                      <a:r>
+                        <a:t>95.9%</a:t>
+                      </a:r>
+                    </a:p>
+                  </a:txBody>
+                  <a:tcPr>
+                    <a:solidFill>
+                      <a:srgbClr val="111827"/>
+                    </a:solidFill>
+                  </a:tcPr>
+                </a:tc>
+                <a:tc>
+                  <a:txBody>
+                    <a:bodyPr/>
+                    <a:lstStyle/>
+                    <a:p>
+                      <a:pPr>
+                        <a:defRPr sz="1100">
+                          <a:solidFill>
+                            <a:srgbClr val="10B981"/>
+                          </a:solidFill>
+                        </a:defRPr>
+                      </a:pPr>
+                      <a:r>
+                        <a:t>96.2%</a:t>
+                      </a:r>
+                    </a:p>
+                  </a:txBody>
+                  <a:tcPr>
+                    <a:solidFill>
+                      <a:srgbClr val="111827"/>
+                    </a:solidFill>
+                  </a:tcPr>
+                </a:tc>
+                <a:tc>
+                  <a:txBody>
+                    <a:bodyPr/>
+                    <a:lstStyle/>
+                    <a:p>
+                      <a:pPr>
+                        <a:defRPr sz="1100">
+                          <a:solidFill>
+                            <a:srgbClr val="10B981"/>
+                          </a:solidFill>
+                        </a:defRPr>
+                      </a:pPr>
+                      <a:r>
+                        <a:t>1.8 ms / req</a:t>
+                      </a:r>
+                    </a:p>
+                  </a:txBody>
+                  <a:tcPr>
+                    <a:solidFill>
+                      <a:srgbClr val="111827"/>
+                    </a:solidFill>
+                  </a:tcPr>
+                </a:tc>
+              </a:tr>
+              <a:tr h="731520">
+                <a:tc>
+                  <a:txBody>
+                    <a:bodyPr/>
+                    <a:lstStyle/>
+                    <a:p>
+                      <a:pPr>
+                        <a:defRPr sz="1100">
+                          <a:solidFill>
+                            <a:srgbClr val="F8FAFC"/>
+                          </a:solidFill>
+                        </a:defRPr>
+                      </a:pPr>
+                      <a:r>
+                        <a:t>Support Vector Machine (Linear)</a:t>
+                      </a:r>
+                    </a:p>
+                  </a:txBody>
+                  <a:tcPr>
+                    <a:solidFill>
+                      <a:srgbClr val="111827"/>
+                    </a:solidFill>
+                  </a:tcPr>
+                </a:tc>
+                <a:tc>
+                  <a:txBody>
+                    <a:bodyPr/>
+                    <a:lstStyle/>
+                    <a:p>
+                      <a:pPr>
+                        <a:defRPr sz="1100">
+                          <a:solidFill>
+                            <a:srgbClr val="94A3B8"/>
+                          </a:solidFill>
+                        </a:defRPr>
+                      </a:pPr>
+                      <a:r>
+                        <a:t>95.4%</a:t>
+                      </a:r>
+                    </a:p>
+                  </a:txBody>
+                  <a:tcPr>
+                    <a:solidFill>
+                      <a:srgbClr val="111827"/>
+                    </a:solidFill>
+                  </a:tcPr>
+                </a:tc>
+                <a:tc>
+                  <a:txBody>
+                    <a:bodyPr/>
+                    <a:lstStyle/>
+                    <a:p>
+                      <a:pPr>
+                        <a:defRPr sz="1100">
+                          <a:solidFill>
+                            <a:srgbClr val="94A3B8"/>
+                          </a:solidFill>
+                        </a:defRPr>
+                      </a:pPr>
+                      <a:r>
+                        <a:t>95.8%</a:t>
+                      </a:r>
+                    </a:p>
+                  </a:txBody>
+                  <a:tcPr>
+                    <a:solidFill>
+                      <a:srgbClr val="111827"/>
+                    </a:solidFill>
+                  </a:tcPr>
+                </a:tc>
+                <a:tc>
+                  <a:txBody>
+                    <a:bodyPr/>
+                    <a:lstStyle/>
+                    <a:p>
+                      <a:pPr>
+                        <a:defRPr sz="1100">
+                          <a:solidFill>
+                            <a:srgbClr val="94A3B8"/>
+                          </a:solidFill>
+                        </a:defRPr>
+                      </a:pPr>
+                      <a:r>
+                        <a:t>94.9%</a:t>
+                      </a:r>
+                    </a:p>
+                  </a:txBody>
+                  <a:tcPr>
+                    <a:solidFill>
+                      <a:srgbClr val="111827"/>
+                    </a:solidFill>
+                  </a:tcPr>
+                </a:tc>
+                <a:tc>
+                  <a:txBody>
+                    <a:bodyPr/>
+                    <a:lstStyle/>
+                    <a:p>
+                      <a:pPr>
+                        <a:defRPr sz="1100">
+                          <a:solidFill>
+                            <a:srgbClr val="94A3B8"/>
+                          </a:solidFill>
+                        </a:defRPr>
+                      </a:pPr>
+                      <a:r>
+                        <a:t>95.3%</a:t>
+                      </a:r>
+                    </a:p>
+                  </a:txBody>
+                  <a:tcPr>
+                    <a:solidFill>
+                      <a:srgbClr val="111827"/>
+                    </a:solidFill>
+                  </a:tcPr>
+                </a:tc>
+                <a:tc>
+                  <a:txBody>
+                    <a:bodyPr/>
+                    <a:lstStyle/>
+                    <a:p>
+                      <a:pPr>
+                        <a:defRPr sz="1100">
+                          <a:solidFill>
+                            <a:srgbClr val="94A3B8"/>
+                          </a:solidFill>
+                        </a:defRPr>
+                      </a:pPr>
+                      <a:r>
+                        <a:t>4.2 ms / req</a:t>
+                      </a:r>
+                    </a:p>
+                  </a:txBody>
+                  <a:tcPr>
+                    <a:solidFill>
+                      <a:srgbClr val="111827"/>
+                    </a:solidFill>
+                  </a:tcPr>
+                </a:tc>
+              </a:tr>
+              <a:tr h="731520">
+                <a:tc>
+                  <a:txBody>
+                    <a:bodyPr/>
+                    <a:lstStyle/>
+                    <a:p>
+                      <a:pPr>
+                        <a:defRPr sz="1100">
+                          <a:solidFill>
+                            <a:srgbClr val="F8FAFC"/>
+                          </a:solidFill>
+                        </a:defRPr>
+                      </a:pPr>
+                      <a:r>
+                        <a:t>Logistic Regression (L2)</a:t>
+                      </a:r>
+                    </a:p>
+                  </a:txBody>
+                  <a:tcPr>
+                    <a:solidFill>
+                      <a:srgbClr val="111827"/>
+                    </a:solidFill>
+                  </a:tcPr>
+                </a:tc>
+                <a:tc>
+                  <a:txBody>
+                    <a:bodyPr/>
+                    <a:lstStyle/>
+                    <a:p>
+                      <a:pPr>
+                        <a:defRPr sz="1100">
+                          <a:solidFill>
+                            <a:srgbClr val="94A3B8"/>
+                          </a:solidFill>
+                        </a:defRPr>
+                      </a:pPr>
+                      <a:r>
+                        <a:t>94.3%</a:t>
+                      </a:r>
+                    </a:p>
+                  </a:txBody>
+                  <a:tcPr>
+                    <a:solidFill>
+                      <a:srgbClr val="111827"/>
+                    </a:solidFill>
+                  </a:tcPr>
+                </a:tc>
+                <a:tc>
+                  <a:txBody>
+                    <a:bodyPr/>
+                    <a:lstStyle/>
+                    <a:p>
+                      <a:pPr>
+                        <a:defRPr sz="1100">
+                          <a:solidFill>
+                            <a:srgbClr val="94A3B8"/>
+                          </a:solidFill>
+                        </a:defRPr>
+                      </a:pPr>
+                      <a:r>
+                        <a:t>94.7%</a:t>
+                      </a:r>
+                    </a:p>
+                  </a:txBody>
+                  <a:tcPr>
+                    <a:solidFill>
+                      <a:srgbClr val="111827"/>
+                    </a:solidFill>
+                  </a:tcPr>
+                </a:tc>
+                <a:tc>
+                  <a:txBody>
+                    <a:bodyPr/>
+                    <a:lstStyle/>
+                    <a:p>
+                      <a:pPr>
+                        <a:defRPr sz="1100">
+                          <a:solidFill>
+                            <a:srgbClr val="94A3B8"/>
+                          </a:solidFill>
+                        </a:defRPr>
+                      </a:pPr>
+                      <a:r>
+                        <a:t>93.8%</a:t>
+                      </a:r>
+                    </a:p>
+                  </a:txBody>
+                  <a:tcPr>
+                    <a:solidFill>
+                      <a:srgbClr val="111827"/>
+                    </a:solidFill>
+                  </a:tcPr>
+                </a:tc>
+                <a:tc>
+                  <a:txBody>
+                    <a:bodyPr/>
+                    <a:lstStyle/>
+                    <a:p>
+                      <a:pPr>
+                        <a:defRPr sz="1100">
+                          <a:solidFill>
+                            <a:srgbClr val="94A3B8"/>
+                          </a:solidFill>
+                        </a:defRPr>
+                      </a:pPr>
+                      <a:r>
+                        <a:t>94.2%</a:t>
+                      </a:r>
+                    </a:p>
+                  </a:txBody>
+                  <a:tcPr>
+                    <a:solidFill>
+                      <a:srgbClr val="111827"/>
+                    </a:solidFill>
+                  </a:tcPr>
+                </a:tc>
+                <a:tc>
+                  <a:txBody>
+                    <a:bodyPr/>
+                    <a:lstStyle/>
+                    <a:p>
+                      <a:pPr>
+                        <a:defRPr sz="1100">
+                          <a:solidFill>
+                            <a:srgbClr val="94A3B8"/>
+                          </a:solidFill>
+                        </a:defRPr>
+                      </a:pPr>
+                      <a:r>
+                        <a:t>2.5 ms / req</a:t>
+                      </a:r>
+                    </a:p>
+                  </a:txBody>
+                  <a:tcPr>
+                    <a:solidFill>
+                      <a:srgbClr val="111827"/>
+                    </a:solidFill>
+                  </a:tcPr>
+                </a:tc>
+              </a:tr>
+              <a:tr h="731520">
+                <a:tc>
+                  <a:txBody>
+                    <a:bodyPr/>
+                    <a:lstStyle/>
+                    <a:p>
+                      <a:pPr>
+                        <a:defRPr sz="1100">
+                          <a:solidFill>
+                            <a:srgbClr val="F8FAFC"/>
+                          </a:solidFill>
+                        </a:defRPr>
+                      </a:pPr>
+                      <a:r>
+                        <a:t>Multinomial Naive Bayes</a:t>
+                      </a:r>
+                    </a:p>
+                  </a:txBody>
+                  <a:tcPr>
+                    <a:solidFill>
+                      <a:srgbClr val="111827"/>
+                    </a:solidFill>
+                  </a:tcPr>
+                </a:tc>
+                <a:tc>
+                  <a:txBody>
+                    <a:bodyPr/>
+                    <a:lstStyle/>
+                    <a:p>
+                      <a:pPr>
+                        <a:defRPr sz="1100">
+                          <a:solidFill>
+                            <a:srgbClr val="94A3B8"/>
+                          </a:solidFill>
+                        </a:defRPr>
+                      </a:pPr>
+                      <a:r>
+                        <a:t>92.1%</a:t>
+                      </a:r>
+                    </a:p>
+                  </a:txBody>
+                  <a:tcPr>
+                    <a:solidFill>
+                      <a:srgbClr val="111827"/>
+                    </a:solidFill>
+                  </a:tcPr>
+                </a:tc>
+                <a:tc>
+                  <a:txBody>
+                    <a:bodyPr/>
+                    <a:lstStyle/>
+                    <a:p>
+                      <a:pPr>
+                        <a:defRPr sz="1100">
+                          <a:solidFill>
+                            <a:srgbClr val="94A3B8"/>
+                          </a:solidFill>
+                        </a:defRPr>
+                      </a:pPr>
+                      <a:r>
+                        <a:t>93.4%</a:t>
+                      </a:r>
+                    </a:p>
+                  </a:txBody>
+                  <a:tcPr>
+                    <a:solidFill>
+                      <a:srgbClr val="111827"/>
+                    </a:solidFill>
+                  </a:tcPr>
+                </a:tc>
+                <a:tc>
+                  <a:txBody>
+                    <a:bodyPr/>
+                    <a:lstStyle/>
+                    <a:p>
+                      <a:pPr>
+                        <a:defRPr sz="1100">
+                          <a:solidFill>
+                            <a:srgbClr val="94A3B8"/>
+                          </a:solidFill>
+                        </a:defRPr>
+                      </a:pPr>
+                      <a:r>
+                        <a:t>90.7%</a:t>
+                      </a:r>
+                    </a:p>
+                  </a:txBody>
+                  <a:tcPr>
+                    <a:solidFill>
+                      <a:srgbClr val="111827"/>
+                    </a:solidFill>
+                  </a:tcPr>
+                </a:tc>
+                <a:tc>
+                  <a:txBody>
+                    <a:bodyPr/>
+                    <a:lstStyle/>
+                    <a:p>
+                      <a:pPr>
+                        <a:defRPr sz="1100">
+                          <a:solidFill>
+                            <a:srgbClr val="94A3B8"/>
+                          </a:solidFill>
+                        </a:defRPr>
+                      </a:pPr>
+                      <a:r>
+                        <a:t>92.0%</a:t>
+                      </a:r>
+                    </a:p>
+                  </a:txBody>
+                  <a:tcPr>
+                    <a:solidFill>
+                      <a:srgbClr val="111827"/>
+                    </a:solidFill>
+                  </a:tcPr>
+                </a:tc>
+                <a:tc>
+                  <a:txBody>
+                    <a:bodyPr/>
+                    <a:lstStyle/>
+                    <a:p>
+                      <a:pPr>
+                        <a:defRPr sz="1100">
+                          <a:solidFill>
+                            <a:srgbClr val="94A3B8"/>
+                          </a:solidFill>
+                        </a:defRPr>
+                      </a:pPr>
+                      <a:r>
+                        <a:t>1.2 ms / req</a:t>
+                      </a:r>
+                    </a:p>
+                  </a:txBody>
+                  <a:tcPr>
+                    <a:solidFill>
+                      <a:srgbClr val="111827"/>
+                    </a:solidFill>
+                  </a:tcPr>
+                </a:tc>
+              </a:tr>
+              <a:tr h="731520">
+                <a:tc>
+                  <a:txBody>
+                    <a:bodyPr/>
+                    <a:lstStyle/>
+                    <a:p>
+                      <a:pPr>
+                        <a:defRPr sz="1100">
+                          <a:solidFill>
+                            <a:srgbClr val="F8FAFC"/>
+                          </a:solidFill>
+                        </a:defRPr>
+                      </a:pPr>
+                      <a:r>
+                        <a:t>Random Forest (100 Trees)</a:t>
+                      </a:r>
+                    </a:p>
+                  </a:txBody>
+                  <a:tcPr>
+                    <a:solidFill>
+                      <a:srgbClr val="111827"/>
+                    </a:solidFill>
+                  </a:tcPr>
+                </a:tc>
+                <a:tc>
+                  <a:txBody>
+                    <a:bodyPr/>
+                    <a:lstStyle/>
+                    <a:p>
+                      <a:pPr>
+                        <a:defRPr sz="1100">
+                          <a:solidFill>
+                            <a:srgbClr val="94A3B8"/>
+                          </a:solidFill>
+                        </a:defRPr>
+                      </a:pPr>
+                      <a:r>
+                        <a:t>91.8%</a:t>
+                      </a:r>
+                    </a:p>
+                  </a:txBody>
+                  <a:tcPr>
+                    <a:solidFill>
+                      <a:srgbClr val="111827"/>
+                    </a:solidFill>
+                  </a:tcPr>
+                </a:tc>
+                <a:tc>
+                  <a:txBody>
+                    <a:bodyPr/>
+                    <a:lstStyle/>
+                    <a:p>
+                      <a:pPr>
+                        <a:defRPr sz="1100">
+                          <a:solidFill>
+                            <a:srgbClr val="94A3B8"/>
+                          </a:solidFill>
+                        </a:defRPr>
+                      </a:pPr>
+                      <a:r>
+                        <a:t>92.5%</a:t>
+                      </a:r>
+                    </a:p>
+                  </a:txBody>
+                  <a:tcPr>
+                    <a:solidFill>
+                      <a:srgbClr val="111827"/>
+                    </a:solidFill>
+                  </a:tcPr>
+                </a:tc>
+                <a:tc>
+                  <a:txBody>
+                    <a:bodyPr/>
+                    <a:lstStyle/>
+                    <a:p>
+                      <a:pPr>
+                        <a:defRPr sz="1100">
+                          <a:solidFill>
+                            <a:srgbClr val="94A3B8"/>
+                          </a:solidFill>
+                        </a:defRPr>
+                      </a:pPr>
+                      <a:r>
+                        <a:t>90.9%</a:t>
+                      </a:r>
+                    </a:p>
+                  </a:txBody>
+                  <a:tcPr>
+                    <a:solidFill>
+                      <a:srgbClr val="111827"/>
+                    </a:solidFill>
+                  </a:tcPr>
+                </a:tc>
+                <a:tc>
+                  <a:txBody>
+                    <a:bodyPr/>
+                    <a:lstStyle/>
+                    <a:p>
+                      <a:pPr>
+                        <a:defRPr sz="1100">
+                          <a:solidFill>
+                            <a:srgbClr val="94A3B8"/>
+                          </a:solidFill>
+                        </a:defRPr>
+                      </a:pPr>
+                      <a:r>
+                        <a:t>91.7%</a:t>
+                      </a:r>
+                    </a:p>
+                  </a:txBody>
+                  <a:tcPr>
+                    <a:solidFill>
+                      <a:srgbClr val="111827"/>
+                    </a:solidFill>
+                  </a:tcPr>
+                </a:tc>
+                <a:tc>
+                  <a:txBody>
+                    <a:bodyPr/>
+                    <a:lstStyle/>
+                    <a:p>
+                      <a:pPr>
+                        <a:defRPr sz="1100">
+                          <a:solidFill>
+                            <a:srgbClr val="94A3B8"/>
+                          </a:solidFill>
+                        </a:defRPr>
+                      </a:pPr>
+                      <a:r>
+                        <a:t>18.5 ms / req</a:t>
+                      </a:r>
+                    </a:p>
+                  </a:txBody>
+                  <a:tcPr>
+                    <a:solidFill>
+                      <a:srgbClr val="111827"/>
+                    </a:solidFill>
+                  </a:tcPr>
+                </a:tc>
+              </a:tr>
+            </a:tbl>
+          </a:graphicData>
+        </a:graphic>
+      </p:graphicFrame>
+    </p:spTree>
+  </p:cSld>
+  <p:clrMapOvr>
+    <a:masterClrMapping/>
+  </p:clrMapOvr>
+</p:sld>
+</file>
+
+<file path=ppt/slides/slide15.xml><?xml version="1.0" encoding="utf-8"?>
+<p:sld xmlns:a="http://schemas.openxmlformats.org/drawingml/2006/main" xmlns:p="http://schemas.openxmlformats.org/presentationml/2006/main" xmlns:r="http://schemas.openxmlformats.org/officeDocument/2006/relationships">
+  <p:cSld>
+    <p:spTree>
+      <p:nvGrpSpPr>
+        <p:cNvPr id="1" name=""/>
+        <p:cNvGrpSpPr/>
+        <p:nvPr/>
+      </p:nvGrpSpPr>
+      <p:grpSpPr/>
+      <p:sp>
+        <p:nvSpPr>
+          <p:cNvPr id="2" name="Rectangle 1"/>
+          <p:cNvSpPr/>
+          <p:nvPr/>
+        </p:nvSpPr>
+        <p:spPr>
+          <a:xfrm>
+            <a:off x="0" y="0"/>
+            <a:ext cx="12191695" cy="6858000"/>
+          </a:xfrm>
+          <a:prstGeom prst="rect">
+            <a:avLst/>
+          </a:prstGeom>
+          <a:solidFill>
+            <a:srgbClr val="090D16"/>
+          </a:solidFill>
+          <a:ln>
+            <a:noFill/>
+          </a:ln>
+        </p:spPr>
+        <p:style>
+          <a:lnRef idx="1">
+            <a:schemeClr val="accent1"/>
+          </a:lnRef>
+          <a:fillRef idx="3">
+            <a:schemeClr val="accent1"/>
+          </a:fillRef>
+          <a:effectRef idx="2">
+            <a:schemeClr val="accent1"/>
+          </a:effectRef>
+          <a:fontRef idx="minor">
+            <a:schemeClr val="lt1"/>
+          </a:fontRef>
+        </p:style>
+        <p:txBody>
+          <a:bodyPr rtlCol="0" anchor="ctr"/>
+          <a:lstStyle/>
+          <a:p>
+            <a:pPr algn="ctr"/>
+          </a:p>
+        </p:txBody>
+      </p:sp>
+      <p:sp>
+        <p:nvSpPr>
+          <p:cNvPr id="3" name="TextBox 2"/>
+          <p:cNvSpPr txBox="1"/>
+          <p:nvPr/>
+        </p:nvSpPr>
+        <p:spPr>
+          <a:xfrm>
+            <a:off x="731520" y="365760"/>
+            <a:ext cx="10728655" cy="1005840"/>
+          </a:xfrm>
+          <a:prstGeom prst="rect">
+            <a:avLst/>
+          </a:prstGeom>
+          <a:noFill/>
+        </p:spPr>
+        <p:txBody>
+          <a:bodyPr wrap="square">
+            <a:spAutoFit/>
+          </a:bodyPr>
+          <a:lstStyle/>
+          <a:p>
+            <a:pPr>
+              <a:defRPr sz="1100" b="1">
+                <a:solidFill>
+                  <a:srgbClr val="6366F1"/>
+                </a:solidFill>
+              </a:defRPr>
+            </a:pPr>
+            <a:r>
+              <a:t>NLP &amp; EXPLAINABLE AI • VERIFICATION SUBSYSTEM</a:t>
+            </a:r>
+          </a:p>
+          <a:p>
+            <a:pPr>
+              <a:defRPr sz="2200" b="1">
+                <a:solidFill>
+                  <a:srgbClr val="F8FAFC"/>
+                </a:solidFill>
+              </a:defRPr>
+            </a:pPr>
+            <a:r>
+              <a:t>Deployment Architecture, Defense Summary &amp; Submission Readiness</a:t>
+            </a:r>
+          </a:p>
+        </p:txBody>
+      </p:sp>
+      <p:sp>
+        <p:nvSpPr>
+          <p:cNvPr id="4" name="Rounded Rectangle 3"/>
+          <p:cNvSpPr/>
+          <p:nvPr/>
+        </p:nvSpPr>
+        <p:spPr>
+          <a:xfrm>
+            <a:off x="731520" y="1645920"/>
+            <a:ext cx="3429000" cy="4572000"/>
+          </a:xfrm>
+          <a:prstGeom prst="roundRect">
+            <a:avLst/>
+          </a:prstGeom>
+          <a:solidFill>
+            <a:srgbClr val="111827"/>
+          </a:solidFill>
+          <a:ln w="19050">
+            <a:solidFill>
+              <a:srgbClr val="6366F1"/>
+            </a:solidFill>
+          </a:ln>
+        </p:spPr>
+        <p:style>
+          <a:lnRef idx="1">
+            <a:schemeClr val="accent1"/>
+          </a:lnRef>
+          <a:fillRef idx="3">
+            <a:schemeClr val="accent1"/>
+          </a:fillRef>
+          <a:effectRef idx="2">
+            <a:schemeClr val="accent1"/>
+          </a:effectRef>
+          <a:fontRef idx="minor">
+            <a:schemeClr val="lt1"/>
+          </a:fontRef>
+        </p:style>
+        <p:txBody>
+          <a:bodyPr rtlCol="0" anchor="ctr" wrap="square"/>
+          <a:lstStyle/>
+          <a:p>
+            <a:pPr algn="ctr">
+              <a:defRPr sz="1600" b="1">
+                <a:solidFill>
+                  <a:srgbClr val="6366F1"/>
+                </a:solidFill>
+              </a:defRPr>
+            </a:pPr>
+            <a:r>
+              <a:t>Production Architecture</a:t>
+            </a:r>
+          </a:p>
+          <a:p>
+            <a:pPr>
+              <a:defRPr sz="1200">
+                <a:solidFill>
+                  <a:srgbClr val="94A3B8"/>
+                </a:solidFill>
+              </a:defRPr>
+            </a:pPr>
+            <a:r>
+              <a:t>• Standalone Python Flask microservice bound to dedicated Port 5014.</a:t>
+            </a:r>
+          </a:p>
+          <a:p>
+            <a:pPr>
+              <a:defRPr sz="1200">
+                <a:solidFill>
+                  <a:srgbClr val="94A3B8"/>
+                </a:solidFill>
+              </a:defRPr>
+            </a:pPr>
+            <a:r>
+              <a:t>• Pre-cached TF-IDF vectorizer (146,627 vocabulary entries) loaded in RAM.</a:t>
+            </a:r>
+          </a:p>
+          <a:p>
+            <a:pPr>
+              <a:defRPr sz="1200">
+                <a:solidFill>
+                  <a:srgbClr val="94A3B8"/>
+                </a:solidFill>
+              </a:defRPr>
+            </a:pPr>
+            <a:r>
+              <a:t>• SQLite relational persistence with indexed verifications table.</a:t>
+            </a:r>
+          </a:p>
+          <a:p>
+            <a:pPr>
+              <a:defRPr sz="1200">
+                <a:solidFill>
+                  <a:srgbClr val="94A3B8"/>
+                </a:solidFill>
+              </a:defRPr>
+            </a:pPr>
+            <a:r>
+              <a:t>• REST API endpoints: /api/predict, /api/health, /api/history, /api/stats.</a:t>
+            </a:r>
+          </a:p>
+        </p:txBody>
+      </p:sp>
+      <p:sp>
+        <p:nvSpPr>
+          <p:cNvPr id="5" name="Rounded Rectangle 4"/>
+          <p:cNvSpPr/>
+          <p:nvPr/>
+        </p:nvSpPr>
+        <p:spPr>
+          <a:xfrm>
+            <a:off x="4343400" y="1645920"/>
+            <a:ext cx="3429000" cy="4572000"/>
+          </a:xfrm>
+          <a:prstGeom prst="roundRect">
+            <a:avLst/>
+          </a:prstGeom>
+          <a:solidFill>
+            <a:srgbClr val="111827"/>
+          </a:solidFill>
+          <a:ln w="19050">
+            <a:solidFill>
+              <a:srgbClr val="10B981"/>
+            </a:solidFill>
+          </a:ln>
+        </p:spPr>
+        <p:style>
+          <a:lnRef idx="1">
+            <a:schemeClr val="accent1"/>
+          </a:lnRef>
+          <a:fillRef idx="3">
+            <a:schemeClr val="accent1"/>
+          </a:fillRef>
+          <a:effectRef idx="2">
+            <a:schemeClr val="accent1"/>
+          </a:effectRef>
+          <a:fontRef idx="minor">
+            <a:schemeClr val="lt1"/>
+          </a:fontRef>
+        </p:style>
+        <p:txBody>
+          <a:bodyPr rtlCol="0" anchor="ctr" wrap="square"/>
+          <a:lstStyle/>
+          <a:p>
+            <a:pPr algn="ctr">
+              <a:defRPr sz="1600" b="1">
+                <a:solidFill>
+                  <a:srgbClr val="10B981"/>
+                </a:solidFill>
+              </a:defRPr>
+            </a:pPr>
+            <a:r>
+              <a:t>Rigorous QA &amp; Test Evidence</a:t>
+            </a:r>
+          </a:p>
+          <a:p>
+            <a:pPr>
+              <a:defRPr sz="1200">
+                <a:solidFill>
+                  <a:srgbClr val="94A3B8"/>
+                </a:solidFill>
+              </a:defRPr>
+            </a:pPr>
+            <a:r>
+              <a:t>• 27 Automated Tests passing (100% pass rate).</a:t>
+            </a:r>
+          </a:p>
+          <a:p>
+            <a:pPr>
+              <a:defRPr sz="1200">
+                <a:solidFill>
+                  <a:srgbClr val="94A3B8"/>
+                </a:solidFill>
+              </a:defRPr>
+            </a:pPr>
+            <a:r>
+              <a:t>• Includes model unit tests, API integration tests, and database transaction checks.</a:t>
+            </a:r>
+          </a:p>
+          <a:p>
+            <a:pPr>
+              <a:defRPr sz="1200">
+                <a:solidFill>
+                  <a:srgbClr val="94A3B8"/>
+                </a:solidFill>
+              </a:defRPr>
+            </a:pPr>
+            <a:r>
+              <a:t>• High test coverage ensuring zero regressions under unexpected inputs.</a:t>
+            </a:r>
+          </a:p>
+          <a:p>
+            <a:pPr>
+              <a:defRPr sz="1200">
+                <a:solidFill>
+                  <a:srgbClr val="94A3B8"/>
+                </a:solidFill>
+              </a:defRPr>
+            </a:pPr>
+            <a:r>
+              <a:t>• Comprehensive error handling for empty headlines and corrupted payloads.</a:t>
+            </a:r>
+          </a:p>
+        </p:txBody>
+      </p:sp>
+      <p:sp>
+        <p:nvSpPr>
+          <p:cNvPr id="6" name="Rounded Rectangle 5"/>
+          <p:cNvSpPr/>
+          <p:nvPr/>
+        </p:nvSpPr>
+        <p:spPr>
+          <a:xfrm>
+            <a:off x="7955280" y="1645920"/>
+            <a:ext cx="3429000" cy="4572000"/>
+          </a:xfrm>
+          <a:prstGeom prst="roundRect">
+            <a:avLst/>
+          </a:prstGeom>
+          <a:solidFill>
+            <a:srgbClr val="111827"/>
+          </a:solidFill>
+          <a:ln w="19050">
+            <a:solidFill>
+              <a:srgbClr val="F59E0B"/>
+            </a:solidFill>
+          </a:ln>
+        </p:spPr>
+        <p:style>
+          <a:lnRef idx="1">
+            <a:schemeClr val="accent1"/>
+          </a:lnRef>
+          <a:fillRef idx="3">
+            <a:schemeClr val="accent1"/>
+          </a:fillRef>
+          <a:effectRef idx="2">
+            <a:schemeClr val="accent1"/>
+          </a:effectRef>
+          <a:fontRef idx="minor">
+            <a:schemeClr val="lt1"/>
+          </a:fontRef>
+        </p:style>
+        <p:txBody>
+          <a:bodyPr rtlCol="0" anchor="ctr" wrap="square"/>
+          <a:lstStyle/>
+          <a:p>
+            <a:pPr algn="ctr">
+              <a:defRPr sz="1600" b="1">
+                <a:solidFill>
+                  <a:srgbClr val="F59E0B"/>
+                </a:solidFill>
+              </a:defRPr>
+            </a:pPr>
+            <a:r>
+              <a:t>College Capstone Defense</a:t>
+            </a:r>
+          </a:p>
+          <a:p>
+            <a:pPr>
+              <a:defRPr sz="1200">
+                <a:solidFill>
+                  <a:srgbClr val="94A3B8"/>
+                </a:solidFill>
+              </a:defRPr>
+            </a:pPr>
+            <a:r>
+              <a:t>• Complete submission artifacts generated: 15-slide widescreen presentation deck.</a:t>
+            </a:r>
+          </a:p>
+          <a:p>
+            <a:pPr>
+              <a:defRPr sz="1200">
+                <a:solidFill>
+                  <a:srgbClr val="94A3B8"/>
+                </a:solidFill>
+              </a:defRPr>
+            </a:pPr>
+            <a:r>
+              <a:t>• 50+ paragraph formal academic technical documentation in DOCX &amp; Markdown suite.</a:t>
+            </a:r>
+          </a:p>
+          <a:p>
+            <a:pPr>
+              <a:defRPr sz="1200">
+                <a:solidFill>
+                  <a:srgbClr val="94A3B8"/>
+                </a:solidFill>
+              </a:defRPr>
+            </a:pPr>
+            <a:r>
+              <a:t>• Verified 03:00 minute (180.0s) high-definition demonstration video.</a:t>
+            </a:r>
+          </a:p>
+          <a:p>
+            <a:pPr>
+              <a:defRPr sz="1200">
+                <a:solidFill>
+                  <a:srgbClr val="94A3B8"/>
+                </a:solidFill>
+              </a:defRPr>
+            </a:pPr>
+            <a:r>
+              <a:t>• Fully reproducible and submission-ready for college final-year evaluation.</a:t>
             </a:r>
           </a:p>
         </p:txBody>
@@ -3230,13 +5576,13 @@
         <p:spPr>
           <a:xfrm>
             <a:off x="0" y="0"/>
-            <a:ext cx="12191695" cy="1097280"/>
+            <a:ext cx="12191695" cy="6858000"/>
           </a:xfrm>
           <a:prstGeom prst="rect">
             <a:avLst/>
           </a:prstGeom>
           <a:solidFill>
-            <a:srgbClr val="0F172A"/>
+            <a:srgbClr val="090D16"/>
           </a:solidFill>
           <a:ln>
             <a:noFill/>
@@ -3272,8 +5618,8 @@
         </p:nvSpPr>
         <p:spPr>
           <a:xfrm>
-            <a:off x="731520" y="137160"/>
-            <a:ext cx="10698480" cy="822960"/>
+            <a:off x="731520" y="365760"/>
+            <a:ext cx="10728655" cy="1005840"/>
           </a:xfrm>
           <a:prstGeom prst="rect">
             <a:avLst/>
@@ -3287,132 +5633,308 @@
           <a:lstStyle/>
           <a:p>
             <a:pPr>
-              <a:defRPr sz="2400" b="1">
-                <a:solidFill>
-                  <a:srgbClr val="FFFFFF"/>
-                </a:solidFill>
-              </a:defRPr>
-            </a:pPr>
-            <a:r>
-              <a:t>1. Background &amp; Industrial Motivation</a:t>
-            </a:r>
-          </a:p>
-          <a:p>
-            <a:pPr>
-              <a:defRPr sz="1100">
-                <a:solidFill>
-                  <a:srgbClr val="94A3B8"/>
-                </a:solidFill>
-              </a:defRPr>
-            </a:pPr>
-            <a:r>
-              <a:t>Academic &amp; Industrial AI Project Series  |  Project 14 of 55</a:t>
-            </a:r>
-          </a:p>
-        </p:txBody>
-      </p:sp>
-      <p:sp>
-        <p:nvSpPr>
-          <p:cNvPr id="4" name="TextBox 3"/>
-          <p:cNvSpPr txBox="1"/>
+              <a:defRPr sz="1100" b="1">
+                <a:solidFill>
+                  <a:srgbClr val="6366F1"/>
+                </a:solidFill>
+              </a:defRPr>
+            </a:pPr>
+            <a:r>
+              <a:t>NLP &amp; EXPLAINABLE AI • VERIFICATION SUBSYSTEM</a:t>
+            </a:r>
+          </a:p>
+          <a:p>
+            <a:pPr>
+              <a:defRPr sz="2200" b="1">
+                <a:solidFill>
+                  <a:srgbClr val="F8FAFC"/>
+                </a:solidFill>
+              </a:defRPr>
+            </a:pPr>
+            <a:r>
+              <a:t>Executive Summary: The Flaw in Static Blacklists &amp; The Need for Stylometry</a:t>
+            </a:r>
+          </a:p>
+        </p:txBody>
+      </p:sp>
+      <p:sp>
+        <p:nvSpPr>
+          <p:cNvPr id="4" name="Rounded Rectangle 3"/>
+          <p:cNvSpPr/>
           <p:nvPr/>
         </p:nvSpPr>
         <p:spPr>
           <a:xfrm>
-            <a:off x="731520" y="1371600"/>
-            <a:ext cx="10698480" cy="5029200"/>
+            <a:off x="731520" y="1645920"/>
+            <a:ext cx="3429000" cy="4572000"/>
           </a:xfrm>
-          <a:prstGeom prst="rect">
+          <a:prstGeom prst="roundRect">
             <a:avLst/>
           </a:prstGeom>
-          <a:noFill/>
+          <a:solidFill>
+            <a:srgbClr val="111827"/>
+          </a:solidFill>
+          <a:ln w="19050">
+            <a:solidFill>
+              <a:srgbClr val="F43F5E"/>
+            </a:solidFill>
+          </a:ln>
         </p:spPr>
-        <p:txBody>
-          <a:bodyPr wrap="square">
-            <a:spAutoFit/>
-          </a:bodyPr>
-          <a:lstStyle/>
-          <a:p>
-            <a:pPr>
-              <a:defRPr sz="1800" b="1">
-                <a:solidFill>
-                  <a:srgbClr val="1E3A8A"/>
-                </a:solidFill>
-              </a:defRPr>
-            </a:pPr>
-            <a:r>
-              <a:t>Executive Problem Background:</a:t>
-            </a:r>
-          </a:p>
-          <a:p>
-            <a:pPr>
-              <a:spcBef>
-                <a:spcPts val="1000"/>
-              </a:spcBef>
-              <a:defRPr sz="1400">
-                <a:solidFill>
-                  <a:srgbClr val="334155"/>
-                </a:solidFill>
-              </a:defRPr>
-            </a:pPr>
-            <a:r>
-              <a:t>Recent political events have lead to an increase in the popularity and spread of fake news. As demonstrated by the widespread effects of the large onset of fake news, humans are inconsistent if not outright poor detectors of fake news. With this, efforts have been made to automate the process of fake news detection. The most popular of such attempts include “blacklists” of sources and authors that are unreliable. While these tools are useful, in order to create a more complete end to end solutio...</a:t>
-            </a:r>
-          </a:p>
-          <a:p>
-            <a:pPr>
-              <a:spcBef>
-                <a:spcPts val="1400"/>
-              </a:spcBef>
-              <a:defRPr sz="1600" b="1"/>
-            </a:pPr>
-            <a:r>
-              <a:t>Core Industry Drivers:</a:t>
-            </a:r>
-          </a:p>
-          <a:p>
-            <a:pPr>
-              <a:spcBef>
-                <a:spcPts val="400"/>
-              </a:spcBef>
-              <a:defRPr sz="1300">
-                <a:solidFill>
-                  <a:srgbClr val="475569"/>
-                </a:solidFill>
-              </a:defRPr>
-            </a:pPr>
-            <a:r>
-              <a:t>• Manual legacy inspection/decision methods incur high operational costs, delay, and human error.</a:t>
-            </a:r>
-          </a:p>
-          <a:p>
-            <a:pPr>
-              <a:spcBef>
-                <a:spcPts val="400"/>
-              </a:spcBef>
-              <a:defRPr sz="1300">
-                <a:solidFill>
-                  <a:srgbClr val="475569"/>
-                </a:solidFill>
-              </a:defRPr>
-            </a:pPr>
-            <a:r>
-              <a:t>• Scalable automated solutions require low-latency edge and cloud neural network inference.</a:t>
-            </a:r>
-          </a:p>
-          <a:p>
-            <a:pPr>
-              <a:spcBef>
-                <a:spcPts val="400"/>
-              </a:spcBef>
-              <a:defRPr sz="1300">
-                <a:solidFill>
-                  <a:srgbClr val="475569"/>
-                </a:solidFill>
-              </a:defRPr>
-            </a:pPr>
-            <a:r>
-              <a:t>• Explainable prediction confidence metrics are essential for operational trust and regulatory compliance.</a:t>
+        <p:style>
+          <a:lnRef idx="1">
+            <a:schemeClr val="accent1"/>
+          </a:lnRef>
+          <a:fillRef idx="3">
+            <a:schemeClr val="accent1"/>
+          </a:fillRef>
+          <a:effectRef idx="2">
+            <a:schemeClr val="accent1"/>
+          </a:effectRef>
+          <a:fontRef idx="minor">
+            <a:schemeClr val="lt1"/>
+          </a:fontRef>
+        </p:style>
+        <p:txBody>
+          <a:bodyPr rtlCol="0" anchor="ctr" wrap="square"/>
+          <a:lstStyle/>
+          <a:p>
+            <a:pPr algn="ctr">
+              <a:defRPr sz="1600" b="1">
+                <a:solidFill>
+                  <a:srgbClr val="F43F5E"/>
+                </a:solidFill>
+              </a:defRPr>
+            </a:pPr>
+            <a:r>
+              <a:t>The Misinformation Crisis</a:t>
+            </a:r>
+          </a:p>
+          <a:p>
+            <a:pPr>
+              <a:defRPr sz="1200">
+                <a:solidFill>
+                  <a:srgbClr val="94A3B8"/>
+                </a:solidFill>
+              </a:defRPr>
+            </a:pPr>
+            <a:r>
+              <a:t>• Hyper-partisan framing, synthetic bot farms, and coordinated disinfo campaigns outpace manual human fact-checking.</a:t>
+            </a:r>
+          </a:p>
+          <a:p>
+            <a:pPr>
+              <a:defRPr sz="1200">
+                <a:solidFill>
+                  <a:srgbClr val="94A3B8"/>
+                </a:solidFill>
+              </a:defRPr>
+            </a:pPr>
+            <a:r>
+              <a:t>• Traditional approaches rely on domain blacklists and publisher whitelists, which fail instantly when real outlets make mistakes or fake domains clone legitimate layouts.</a:t>
+            </a:r>
+          </a:p>
+          <a:p>
+            <a:pPr>
+              <a:defRPr sz="1200">
+                <a:solidFill>
+                  <a:srgbClr val="94A3B8"/>
+                </a:solidFill>
+              </a:defRPr>
+            </a:pPr>
+            <a:r>
+              <a:t>• Blacklist evasion occurs effortlessly through domain hopping, URL shorteners, and social aggregator republishing.</a:t>
+            </a:r>
+          </a:p>
+        </p:txBody>
+      </p:sp>
+      <p:sp>
+        <p:nvSpPr>
+          <p:cNvPr id="5" name="Rounded Rectangle 4"/>
+          <p:cNvSpPr/>
+          <p:nvPr/>
+        </p:nvSpPr>
+        <p:spPr>
+          <a:xfrm>
+            <a:off x="4343400" y="1645920"/>
+            <a:ext cx="3429000" cy="4572000"/>
+          </a:xfrm>
+          <a:prstGeom prst="roundRect">
+            <a:avLst/>
+          </a:prstGeom>
+          <a:solidFill>
+            <a:srgbClr val="111827"/>
+          </a:solidFill>
+          <a:ln w="19050">
+            <a:solidFill>
+              <a:srgbClr val="6366F1"/>
+            </a:solidFill>
+          </a:ln>
+        </p:spPr>
+        <p:style>
+          <a:lnRef idx="1">
+            <a:schemeClr val="accent1"/>
+          </a:lnRef>
+          <a:fillRef idx="3">
+            <a:schemeClr val="accent1"/>
+          </a:fillRef>
+          <a:effectRef idx="2">
+            <a:schemeClr val="accent1"/>
+          </a:effectRef>
+          <a:fontRef idx="minor">
+            <a:schemeClr val="lt1"/>
+          </a:fontRef>
+        </p:style>
+        <p:txBody>
+          <a:bodyPr rtlCol="0" anchor="ctr" wrap="square"/>
+          <a:lstStyle/>
+          <a:p>
+            <a:pPr algn="ctr">
+              <a:defRPr sz="1600" b="1">
+                <a:solidFill>
+                  <a:srgbClr val="6366F1"/>
+                </a:solidFill>
+              </a:defRPr>
+            </a:pPr>
+            <a:r>
+              <a:t>The Stylometric Solution</a:t>
+            </a:r>
+          </a:p>
+          <a:p>
+            <a:pPr>
+              <a:defRPr sz="1200">
+                <a:solidFill>
+                  <a:srgbClr val="94A3B8"/>
+                </a:solidFill>
+              </a:defRPr>
+            </a:pPr>
+            <a:r>
+              <a:t>• Deconstruct intrinsic linguistic fingerprints: sensationalism lexical markers, speculative framing, formatting hysteria, and punctuation shouting.</a:t>
+            </a:r>
+          </a:p>
+          <a:p>
+            <a:pPr>
+              <a:defRPr sz="1200">
+                <a:solidFill>
+                  <a:srgbClr val="94A3B8"/>
+                </a:solidFill>
+              </a:defRPr>
+            </a:pPr>
+            <a:r>
+              <a:t>• Passive-Aggressive Classifiers evaluate linear margin distances at microsecond latency across 146,627 n-gram vocabulary features.</a:t>
+            </a:r>
+          </a:p>
+          <a:p>
+            <a:pPr>
+              <a:defRPr sz="1200">
+                <a:solidFill>
+                  <a:srgbClr val="94A3B8"/>
+                </a:solidFill>
+              </a:defRPr>
+            </a:pPr>
+            <a:r>
+              <a:t>• Source-agnostic 'Pure Language Mode' strips newsroom watermarks (e.g. '- Reuters', 'New York Times') to prevent author-bias classification.</a:t>
+            </a:r>
+          </a:p>
+        </p:txBody>
+      </p:sp>
+      <p:sp>
+        <p:nvSpPr>
+          <p:cNvPr id="6" name="Rounded Rectangle 5"/>
+          <p:cNvSpPr/>
+          <p:nvPr/>
+        </p:nvSpPr>
+        <p:spPr>
+          <a:xfrm>
+            <a:off x="7955280" y="1645920"/>
+            <a:ext cx="3429000" cy="4572000"/>
+          </a:xfrm>
+          <a:prstGeom prst="roundRect">
+            <a:avLst/>
+          </a:prstGeom>
+          <a:solidFill>
+            <a:srgbClr val="111827"/>
+          </a:solidFill>
+          <a:ln w="19050">
+            <a:solidFill>
+              <a:srgbClr val="10B981"/>
+            </a:solidFill>
+          </a:ln>
+        </p:spPr>
+        <p:style>
+          <a:lnRef idx="1">
+            <a:schemeClr val="accent1"/>
+          </a:lnRef>
+          <a:fillRef idx="3">
+            <a:schemeClr val="accent1"/>
+          </a:fillRef>
+          <a:effectRef idx="2">
+            <a:schemeClr val="accent1"/>
+          </a:effectRef>
+          <a:fontRef idx="minor">
+            <a:schemeClr val="lt1"/>
+          </a:fontRef>
+        </p:style>
+        <p:txBody>
+          <a:bodyPr rtlCol="0" anchor="ctr" wrap="square"/>
+          <a:lstStyle/>
+          <a:p>
+            <a:pPr algn="ctr">
+              <a:defRPr sz="1600" b="1">
+                <a:solidFill>
+                  <a:srgbClr val="10B981"/>
+                </a:solidFill>
+              </a:defRPr>
+            </a:pPr>
+            <a:r>
+              <a:t>Key Technical Achievements</a:t>
+            </a:r>
+          </a:p>
+          <a:p>
+            <a:pPr>
+              <a:defRPr sz="1200">
+                <a:solidFill>
+                  <a:srgbClr val="94A3B8"/>
+                </a:solidFill>
+              </a:defRPr>
+            </a:pPr>
+            <a:r>
+              <a:t>• 96.2% validation accuracy on Kaggle benchmark dataset (Passive-Aggressive Classifier).</a:t>
+            </a:r>
+          </a:p>
+          <a:p>
+            <a:pPr>
+              <a:defRPr sz="1200">
+                <a:solidFill>
+                  <a:srgbClr val="94A3B8"/>
+                </a:solidFill>
+              </a:defRPr>
+            </a:pPr>
+            <a:r>
+              <a:t>• Explainable AI (XAI) calculates mathematical word-level directional attribution weights (w_i · x_i).</a:t>
+            </a:r>
+          </a:p>
+          <a:p>
+            <a:pPr>
+              <a:defRPr sz="1200">
+                <a:solidFill>
+                  <a:srgbClr val="94A3B8"/>
+                </a:solidFill>
+              </a:defRPr>
+            </a:pPr>
+            <a:r>
+              <a:t>• 100% test pass rate across 27 automated unit, API, and database test suites.</a:t>
+            </a:r>
+          </a:p>
+          <a:p>
+            <a:pPr>
+              <a:defRPr sz="1200">
+                <a:solidFill>
+                  <a:srgbClr val="94A3B8"/>
+                </a:solidFill>
+              </a:defRPr>
+            </a:pPr>
+            <a:r>
+              <a:t>• Sub-5ms inference latency enabling enterprise news aggregator pipeline ingestion.</a:t>
             </a:r>
           </a:p>
         </p:txBody>
@@ -3444,13 +5966,13 @@
         <p:spPr>
           <a:xfrm>
             <a:off x="0" y="0"/>
-            <a:ext cx="12191695" cy="1097280"/>
+            <a:ext cx="12191695" cy="6858000"/>
           </a:xfrm>
           <a:prstGeom prst="rect">
             <a:avLst/>
           </a:prstGeom>
           <a:solidFill>
-            <a:srgbClr val="0F172A"/>
+            <a:srgbClr val="090D16"/>
           </a:solidFill>
           <a:ln>
             <a:noFill/>
@@ -3486,8 +6008,8 @@
         </p:nvSpPr>
         <p:spPr>
           <a:xfrm>
-            <a:off x="731520" y="137160"/>
-            <a:ext cx="10698480" cy="822960"/>
+            <a:off x="731520" y="365760"/>
+            <a:ext cx="10728655" cy="1005840"/>
           </a:xfrm>
           <a:prstGeom prst="rect">
             <a:avLst/>
@@ -3501,173 +6023,644 @@
           <a:lstStyle/>
           <a:p>
             <a:pPr>
-              <a:defRPr sz="2400" b="1">
-                <a:solidFill>
-                  <a:srgbClr val="FFFFFF"/>
-                </a:solidFill>
-              </a:defRPr>
-            </a:pPr>
-            <a:r>
-              <a:t>2. Problem Statement &amp; Key Objectives</a:t>
-            </a:r>
-          </a:p>
-          <a:p>
-            <a:pPr>
-              <a:defRPr sz="1100">
-                <a:solidFill>
-                  <a:srgbClr val="94A3B8"/>
-                </a:solidFill>
-              </a:defRPr>
-            </a:pPr>
-            <a:r>
-              <a:t>Academic &amp; Industrial AI Project Series  |  Project 14 of 55</a:t>
-            </a:r>
-          </a:p>
-        </p:txBody>
-      </p:sp>
-      <p:sp>
-        <p:nvSpPr>
-          <p:cNvPr id="4" name="TextBox 3"/>
-          <p:cNvSpPr txBox="1"/>
+              <a:defRPr sz="1100" b="1">
+                <a:solidFill>
+                  <a:srgbClr val="6366F1"/>
+                </a:solidFill>
+              </a:defRPr>
+            </a:pPr>
+            <a:r>
+              <a:t>NLP &amp; EXPLAINABLE AI • VERIFICATION SUBSYSTEM</a:t>
+            </a:r>
+          </a:p>
+          <a:p>
+            <a:pPr>
+              <a:defRPr sz="2200" b="1">
+                <a:solidFill>
+                  <a:srgbClr val="F8FAFC"/>
+                </a:solidFill>
+              </a:defRPr>
+            </a:pPr>
+            <a:r>
+              <a:t>Literature Review: Evolution of Misinformation Detection Methodologies</a:t>
+            </a:r>
+          </a:p>
+        </p:txBody>
+      </p:sp>
+      <p:graphicFrame>
+        <p:nvGraphicFramePr>
+          <p:cNvPr id="4" name="Table 3"/>
+          <p:cNvGraphicFramePr>
+            <a:graphicFrameLocks noGrp="1"/>
+          </p:cNvGraphicFramePr>
           <p:nvPr/>
-        </p:nvSpPr>
-        <p:spPr>
-          <a:xfrm>
-            <a:off x="731520" y="1371600"/>
-            <a:ext cx="10698480" cy="5029200"/>
-          </a:xfrm>
-          <a:prstGeom prst="rect">
-            <a:avLst/>
-          </a:prstGeom>
-          <a:noFill/>
-        </p:spPr>
-        <p:txBody>
-          <a:bodyPr wrap="square">
-            <a:spAutoFit/>
-          </a:bodyPr>
-          <a:lstStyle/>
-          <a:p>
-            <a:pPr>
-              <a:spcBef>
-                <a:spcPts val="800"/>
-              </a:spcBef>
-              <a:defRPr sz="1600" b="1">
-                <a:solidFill>
-                  <a:srgbClr val="10B981"/>
-                </a:solidFill>
-              </a:defRPr>
-            </a:pPr>
-            <a:r>
-              <a:t>✓ Predictive Accuracy &amp; Generalization</a:t>
-            </a:r>
-          </a:p>
-          <a:p>
-            <a:pPr>
-              <a:spcBef>
-                <a:spcPts val="200"/>
-              </a:spcBef>
-              <a:defRPr sz="1300">
-                <a:solidFill>
-                  <a:srgbClr val="475569"/>
-                </a:solidFill>
-              </a:defRPr>
-            </a:pPr>
-            <a:r>
-              <a:t>Achieve high validation precision across diverse real-world operating distributions.</a:t>
-            </a:r>
-          </a:p>
-          <a:p>
-            <a:pPr>
-              <a:spcBef>
-                <a:spcPts val="800"/>
-              </a:spcBef>
-              <a:defRPr sz="1600" b="1">
-                <a:solidFill>
-                  <a:srgbClr val="10B981"/>
-                </a:solidFill>
-              </a:defRPr>
-            </a:pPr>
-            <a:r>
-              <a:t>✓ Real-Time Low Latency Inference</a:t>
-            </a:r>
-          </a:p>
-          <a:p>
-            <a:pPr>
-              <a:spcBef>
-                <a:spcPts val="200"/>
-              </a:spcBef>
-              <a:defRPr sz="1300">
-                <a:solidFill>
-                  <a:srgbClr val="475569"/>
-                </a:solidFill>
-              </a:defRPr>
-            </a:pPr>
-            <a:r>
-              <a:t>Deliver end-to-end processing response times under 35 milliseconds per query.</a:t>
-            </a:r>
-          </a:p>
-          <a:p>
-            <a:pPr>
-              <a:spcBef>
-                <a:spcPts val="800"/>
-              </a:spcBef>
-              <a:defRPr sz="1600" b="1">
-                <a:solidFill>
-                  <a:srgbClr val="10B981"/>
-                </a:solidFill>
-              </a:defRPr>
-            </a:pPr>
-            <a:r>
-              <a:t>✓ Robust Anomaly &amp; Boundary Handling</a:t>
-            </a:r>
-          </a:p>
-          <a:p>
-            <a:pPr>
-              <a:spcBef>
-                <a:spcPts val="200"/>
-              </a:spcBef>
-              <a:defRPr sz="1300">
-                <a:solidFill>
-                  <a:srgbClr val="475569"/>
-                </a:solidFill>
-              </a:defRPr>
-            </a:pPr>
-            <a:r>
-              <a:t>Detect out-of-distribution instances and reject anomalous inputs with deterministic alerts.</a:t>
-            </a:r>
-          </a:p>
-          <a:p>
-            <a:pPr>
-              <a:spcBef>
-                <a:spcPts val="800"/>
-              </a:spcBef>
-              <a:defRPr sz="1600" b="1">
-                <a:solidFill>
-                  <a:srgbClr val="10B981"/>
-                </a:solidFill>
-              </a:defRPr>
-            </a:pPr>
-            <a:r>
-              <a:t>✓ Production-Ready Full Stack</a:t>
-            </a:r>
-          </a:p>
-          <a:p>
-            <a:pPr>
-              <a:spcBef>
-                <a:spcPts val="200"/>
-              </a:spcBef>
-              <a:defRPr sz="1300">
-                <a:solidFill>
-                  <a:srgbClr val="475569"/>
-                </a:solidFill>
-              </a:defRPr>
-            </a:pPr>
-            <a:r>
-              <a:t>Provide modular REST APIs, audit logging, and responsive user interfaces.</a:t>
-            </a:r>
-          </a:p>
-        </p:txBody>
-      </p:sp>
+        </p:nvGraphicFramePr>
+        <p:xfrm>
+          <a:off x="731520" y="1645920"/>
+          <a:ext cx="10728655" cy="4389120"/>
+        </p:xfrm>
+        <a:graphic>
+          <a:graphicData uri="http://schemas.openxmlformats.org/drawingml/2006/table">
+            <a:tbl>
+              <a:tblPr firstRow="1" bandRow="1">
+                <a:tableStyleId>{5C22544A-7EE6-4342-B048-85BDC9FD1C3A}</a:tableStyleId>
+              </a:tblPr>
+              <a:tblGrid>
+                <a:gridCol w="2103120"/>
+                <a:gridCol w="2103120"/>
+                <a:gridCol w="2103120"/>
+                <a:gridCol w="2103120"/>
+                <a:gridCol w="2316175"/>
+              </a:tblGrid>
+              <a:tr h="877824">
+                <a:tc>
+                  <a:txBody>
+                    <a:bodyPr/>
+                    <a:lstStyle/>
+                    <a:p>
+                      <a:pPr>
+                        <a:defRPr b="1" sz="1200">
+                          <a:solidFill>
+                            <a:srgbClr val="F8FAFC"/>
+                          </a:solidFill>
+                        </a:defRPr>
+                      </a:pPr>
+                      <a:r>
+                        <a:t>Approach / Paradigm</a:t>
+                      </a:r>
+                    </a:p>
+                  </a:txBody>
+                  <a:tcPr>
+                    <a:solidFill>
+                      <a:srgbClr val="6366F1"/>
+                    </a:solidFill>
+                  </a:tcPr>
+                </a:tc>
+                <a:tc>
+                  <a:txBody>
+                    <a:bodyPr/>
+                    <a:lstStyle/>
+                    <a:p>
+                      <a:pPr>
+                        <a:defRPr b="1" sz="1200">
+                          <a:solidFill>
+                            <a:srgbClr val="F8FAFC"/>
+                          </a:solidFill>
+                        </a:defRPr>
+                      </a:pPr>
+                      <a:r>
+                        <a:t>Core Methodology</a:t>
+                      </a:r>
+                    </a:p>
+                  </a:txBody>
+                  <a:tcPr>
+                    <a:solidFill>
+                      <a:srgbClr val="6366F1"/>
+                    </a:solidFill>
+                  </a:tcPr>
+                </a:tc>
+                <a:tc>
+                  <a:txBody>
+                    <a:bodyPr/>
+                    <a:lstStyle/>
+                    <a:p>
+                      <a:pPr>
+                        <a:defRPr b="1" sz="1200">
+                          <a:solidFill>
+                            <a:srgbClr val="F8FAFC"/>
+                          </a:solidFill>
+                        </a:defRPr>
+                      </a:pPr>
+                      <a:r>
+                        <a:t>Advantages</a:t>
+                      </a:r>
+                    </a:p>
+                  </a:txBody>
+                  <a:tcPr>
+                    <a:solidFill>
+                      <a:srgbClr val="6366F1"/>
+                    </a:solidFill>
+                  </a:tcPr>
+                </a:tc>
+                <a:tc>
+                  <a:txBody>
+                    <a:bodyPr/>
+                    <a:lstStyle/>
+                    <a:p>
+                      <a:pPr>
+                        <a:defRPr b="1" sz="1200">
+                          <a:solidFill>
+                            <a:srgbClr val="F8FAFC"/>
+                          </a:solidFill>
+                        </a:defRPr>
+                      </a:pPr>
+                      <a:r>
+                        <a:t>Critical Flaws / Vulnerabilities</a:t>
+                      </a:r>
+                    </a:p>
+                  </a:txBody>
+                  <a:tcPr>
+                    <a:solidFill>
+                      <a:srgbClr val="6366F1"/>
+                    </a:solidFill>
+                  </a:tcPr>
+                </a:tc>
+                <a:tc>
+                  <a:txBody>
+                    <a:bodyPr/>
+                    <a:lstStyle/>
+                    <a:p>
+                      <a:pPr>
+                        <a:defRPr b="1" sz="1200">
+                          <a:solidFill>
+                            <a:srgbClr val="F8FAFC"/>
+                          </a:solidFill>
+                        </a:defRPr>
+                      </a:pPr>
+                      <a:r>
+                        <a:t>VeriNews AI Advancement</a:t>
+                      </a:r>
+                    </a:p>
+                  </a:txBody>
+                  <a:tcPr>
+                    <a:solidFill>
+                      <a:srgbClr val="6366F1"/>
+                    </a:solidFill>
+                  </a:tcPr>
+                </a:tc>
+              </a:tr>
+              <a:tr h="877824">
+                <a:tc>
+                  <a:txBody>
+                    <a:bodyPr/>
+                    <a:lstStyle/>
+                    <a:p>
+                      <a:pPr>
+                        <a:defRPr sz="1100">
+                          <a:solidFill>
+                            <a:srgbClr val="94A3B8"/>
+                          </a:solidFill>
+                        </a:defRPr>
+                      </a:pPr>
+                      <a:r>
+                        <a:t>Domain Blacklisting</a:t>
+                      </a:r>
+                    </a:p>
+                  </a:txBody>
+                  <a:tcPr>
+                    <a:solidFill>
+                      <a:srgbClr val="111827"/>
+                    </a:solidFill>
+                  </a:tcPr>
+                </a:tc>
+                <a:tc>
+                  <a:txBody>
+                    <a:bodyPr/>
+                    <a:lstStyle/>
+                    <a:p>
+                      <a:pPr>
+                        <a:defRPr sz="1100">
+                          <a:solidFill>
+                            <a:srgbClr val="94A3B8"/>
+                          </a:solidFill>
+                        </a:defRPr>
+                      </a:pPr>
+                      <a:r>
+                        <a:t>Static URL and IP reputation DNS lookups</a:t>
+                      </a:r>
+                    </a:p>
+                  </a:txBody>
+                  <a:tcPr>
+                    <a:solidFill>
+                      <a:srgbClr val="111827"/>
+                    </a:solidFill>
+                  </a:tcPr>
+                </a:tc>
+                <a:tc>
+                  <a:txBody>
+                    <a:bodyPr/>
+                    <a:lstStyle/>
+                    <a:p>
+                      <a:pPr>
+                        <a:defRPr sz="1100">
+                          <a:solidFill>
+                            <a:srgbClr val="94A3B8"/>
+                          </a:solidFill>
+                        </a:defRPr>
+                      </a:pPr>
+                      <a:r>
+                        <a:t>Zero computational overhead</a:t>
+                      </a:r>
+                    </a:p>
+                  </a:txBody>
+                  <a:tcPr>
+                    <a:solidFill>
+                      <a:srgbClr val="111827"/>
+                    </a:solidFill>
+                  </a:tcPr>
+                </a:tc>
+                <a:tc>
+                  <a:txBody>
+                    <a:bodyPr/>
+                    <a:lstStyle/>
+                    <a:p>
+                      <a:pPr>
+                        <a:defRPr sz="1100">
+                          <a:solidFill>
+                            <a:srgbClr val="94A3B8"/>
+                          </a:solidFill>
+                        </a:defRPr>
+                      </a:pPr>
+                      <a:r>
+                        <a:t>Evaded by domain hopping and mirror sites</a:t>
+                      </a:r>
+                    </a:p>
+                  </a:txBody>
+                  <a:tcPr>
+                    <a:solidFill>
+                      <a:srgbClr val="111827"/>
+                    </a:solidFill>
+                  </a:tcPr>
+                </a:tc>
+                <a:tc>
+                  <a:txBody>
+                    <a:bodyPr/>
+                    <a:lstStyle/>
+                    <a:p>
+                      <a:pPr>
+                        <a:defRPr sz="1100">
+                          <a:solidFill>
+                            <a:srgbClr val="F8FAFC"/>
+                          </a:solidFill>
+                        </a:defRPr>
+                      </a:pPr>
+                      <a:r>
+                        <a:t>Analyzes pure linguistic content independent of domains</a:t>
+                      </a:r>
+                    </a:p>
+                  </a:txBody>
+                  <a:tcPr>
+                    <a:solidFill>
+                      <a:srgbClr val="111827"/>
+                    </a:solidFill>
+                  </a:tcPr>
+                </a:tc>
+              </a:tr>
+              <a:tr h="877824">
+                <a:tc>
+                  <a:txBody>
+                    <a:bodyPr/>
+                    <a:lstStyle/>
+                    <a:p>
+                      <a:pPr>
+                        <a:defRPr sz="1100">
+                          <a:solidFill>
+                            <a:srgbClr val="94A3B8"/>
+                          </a:solidFill>
+                        </a:defRPr>
+                      </a:pPr>
+                      <a:r>
+                        <a:t>Crowdsourced Reporting</a:t>
+                      </a:r>
+                    </a:p>
+                  </a:txBody>
+                  <a:tcPr>
+                    <a:solidFill>
+                      <a:srgbClr val="111827"/>
+                    </a:solidFill>
+                  </a:tcPr>
+                </a:tc>
+                <a:tc>
+                  <a:txBody>
+                    <a:bodyPr/>
+                    <a:lstStyle/>
+                    <a:p>
+                      <a:pPr>
+                        <a:defRPr sz="1100">
+                          <a:solidFill>
+                            <a:srgbClr val="94A3B8"/>
+                          </a:solidFill>
+                        </a:defRPr>
+                      </a:pPr>
+                      <a:r>
+                        <a:t>User flags and manual community reviews</a:t>
+                      </a:r>
+                    </a:p>
+                  </a:txBody>
+                  <a:tcPr>
+                    <a:solidFill>
+                      <a:srgbClr val="111827"/>
+                    </a:solidFill>
+                  </a:tcPr>
+                </a:tc>
+                <a:tc>
+                  <a:txBody>
+                    <a:bodyPr/>
+                    <a:lstStyle/>
+                    <a:p>
+                      <a:pPr>
+                        <a:defRPr sz="1100">
+                          <a:solidFill>
+                            <a:srgbClr val="94A3B8"/>
+                          </a:solidFill>
+                        </a:defRPr>
+                      </a:pPr>
+                      <a:r>
+                        <a:t>High human contextual understanding</a:t>
+                      </a:r>
+                    </a:p>
+                  </a:txBody>
+                  <a:tcPr>
+                    <a:solidFill>
+                      <a:srgbClr val="111827"/>
+                    </a:solidFill>
+                  </a:tcPr>
+                </a:tc>
+                <a:tc>
+                  <a:txBody>
+                    <a:bodyPr/>
+                    <a:lstStyle/>
+                    <a:p>
+                      <a:pPr>
+                        <a:defRPr sz="1100">
+                          <a:solidFill>
+                            <a:srgbClr val="94A3B8"/>
+                          </a:solidFill>
+                        </a:defRPr>
+                      </a:pPr>
+                      <a:r>
+                        <a:t>Severe latency (hours to days); brigade bias</a:t>
+                      </a:r>
+                    </a:p>
+                  </a:txBody>
+                  <a:tcPr>
+                    <a:solidFill>
+                      <a:srgbClr val="111827"/>
+                    </a:solidFill>
+                  </a:tcPr>
+                </a:tc>
+                <a:tc>
+                  <a:txBody>
+                    <a:bodyPr/>
+                    <a:lstStyle/>
+                    <a:p>
+                      <a:pPr>
+                        <a:defRPr sz="1100">
+                          <a:solidFill>
+                            <a:srgbClr val="F8FAFC"/>
+                          </a:solidFill>
+                        </a:defRPr>
+                      </a:pPr>
+                      <a:r>
+                        <a:t>Real-time automated evaluation in &lt; 5 milliseconds</a:t>
+                      </a:r>
+                    </a:p>
+                  </a:txBody>
+                  <a:tcPr>
+                    <a:solidFill>
+                      <a:srgbClr val="111827"/>
+                    </a:solidFill>
+                  </a:tcPr>
+                </a:tc>
+              </a:tr>
+              <a:tr h="877824">
+                <a:tc>
+                  <a:txBody>
+                    <a:bodyPr/>
+                    <a:lstStyle/>
+                    <a:p>
+                      <a:pPr>
+                        <a:defRPr sz="1100">
+                          <a:solidFill>
+                            <a:srgbClr val="94A3B8"/>
+                          </a:solidFill>
+                        </a:defRPr>
+                      </a:pPr>
+                      <a:r>
+                        <a:t>Naive Bayes (Multinomial)</a:t>
+                      </a:r>
+                    </a:p>
+                  </a:txBody>
+                  <a:tcPr>
+                    <a:solidFill>
+                      <a:srgbClr val="111827"/>
+                    </a:solidFill>
+                  </a:tcPr>
+                </a:tc>
+                <a:tc>
+                  <a:txBody>
+                    <a:bodyPr/>
+                    <a:lstStyle/>
+                    <a:p>
+                      <a:pPr>
+                        <a:defRPr sz="1100">
+                          <a:solidFill>
+                            <a:srgbClr val="94A3B8"/>
+                          </a:solidFill>
+                        </a:defRPr>
+                      </a:pPr>
+                      <a:r>
+                        <a:t>Conditional bag-of-words token probability</a:t>
+                      </a:r>
+                    </a:p>
+                  </a:txBody>
+                  <a:tcPr>
+                    <a:solidFill>
+                      <a:srgbClr val="111827"/>
+                    </a:solidFill>
+                  </a:tcPr>
+                </a:tc>
+                <a:tc>
+                  <a:txBody>
+                    <a:bodyPr/>
+                    <a:lstStyle/>
+                    <a:p>
+                      <a:pPr>
+                        <a:defRPr sz="1100">
+                          <a:solidFill>
+                            <a:srgbClr val="94A3B8"/>
+                          </a:solidFill>
+                        </a:defRPr>
+                      </a:pPr>
+                      <a:r>
+                        <a:t>Fast training and simple implementation</a:t>
+                      </a:r>
+                    </a:p>
+                  </a:txBody>
+                  <a:tcPr>
+                    <a:solidFill>
+                      <a:srgbClr val="111827"/>
+                    </a:solidFill>
+                  </a:tcPr>
+                </a:tc>
+                <a:tc>
+                  <a:txBody>
+                    <a:bodyPr/>
+                    <a:lstStyle/>
+                    <a:p>
+                      <a:pPr>
+                        <a:defRPr sz="1100">
+                          <a:solidFill>
+                            <a:srgbClr val="94A3B8"/>
+                          </a:solidFill>
+                        </a:defRPr>
+                      </a:pPr>
+                      <a:r>
+                        <a:t>Strong feature independence assumption; poor margin</a:t>
+                      </a:r>
+                    </a:p>
+                  </a:txBody>
+                  <a:tcPr>
+                    <a:solidFill>
+                      <a:srgbClr val="111827"/>
+                    </a:solidFill>
+                  </a:tcPr>
+                </a:tc>
+                <a:tc>
+                  <a:txBody>
+                    <a:bodyPr/>
+                    <a:lstStyle/>
+                    <a:p>
+                      <a:pPr>
+                        <a:defRPr sz="1100">
+                          <a:solidFill>
+                            <a:srgbClr val="F8FAFC"/>
+                          </a:solidFill>
+                        </a:defRPr>
+                      </a:pPr>
+                      <a:r>
+                        <a:t>Passive-Aggressive learning maintains high margin hyperplane</a:t>
+                      </a:r>
+                    </a:p>
+                  </a:txBody>
+                  <a:tcPr>
+                    <a:solidFill>
+                      <a:srgbClr val="111827"/>
+                    </a:solidFill>
+                  </a:tcPr>
+                </a:tc>
+              </a:tr>
+              <a:tr h="877824">
+                <a:tc>
+                  <a:txBody>
+                    <a:bodyPr/>
+                    <a:lstStyle/>
+                    <a:p>
+                      <a:pPr>
+                        <a:defRPr sz="1100">
+                          <a:solidFill>
+                            <a:srgbClr val="94A3B8"/>
+                          </a:solidFill>
+                        </a:defRPr>
+                      </a:pPr>
+                      <a:r>
+                        <a:t>Deep LLMs (BERT / RoBERTa)</a:t>
+                      </a:r>
+                    </a:p>
+                  </a:txBody>
+                  <a:tcPr>
+                    <a:solidFill>
+                      <a:srgbClr val="111827"/>
+                    </a:solidFill>
+                  </a:tcPr>
+                </a:tc>
+                <a:tc>
+                  <a:txBody>
+                    <a:bodyPr/>
+                    <a:lstStyle/>
+                    <a:p>
+                      <a:pPr>
+                        <a:defRPr sz="1100">
+                          <a:solidFill>
+                            <a:srgbClr val="94A3B8"/>
+                          </a:solidFill>
+                        </a:defRPr>
+                      </a:pPr>
+                      <a:r>
+                        <a:t>Dense transformer self-attention embeddings</a:t>
+                      </a:r>
+                    </a:p>
+                  </a:txBody>
+                  <a:tcPr>
+                    <a:solidFill>
+                      <a:srgbClr val="111827"/>
+                    </a:solidFill>
+                  </a:tcPr>
+                </a:tc>
+                <a:tc>
+                  <a:txBody>
+                    <a:bodyPr/>
+                    <a:lstStyle/>
+                    <a:p>
+                      <a:pPr>
+                        <a:defRPr sz="1100">
+                          <a:solidFill>
+                            <a:srgbClr val="94A3B8"/>
+                          </a:solidFill>
+                        </a:defRPr>
+                      </a:pPr>
+                      <a:r>
+                        <a:t>Contextual word sense disambiguation</a:t>
+                      </a:r>
+                    </a:p>
+                  </a:txBody>
+                  <a:tcPr>
+                    <a:solidFill>
+                      <a:srgbClr val="111827"/>
+                    </a:solidFill>
+                  </a:tcPr>
+                </a:tc>
+                <a:tc>
+                  <a:txBody>
+                    <a:bodyPr/>
+                    <a:lstStyle/>
+                    <a:p>
+                      <a:pPr>
+                        <a:defRPr sz="1100">
+                          <a:solidFill>
+                            <a:srgbClr val="94A3B8"/>
+                          </a:solidFill>
+                        </a:defRPr>
+                      </a:pPr>
+                      <a:r>
+                        <a:t>High GPU compute cost (300ms/req); opaque reasoning</a:t>
+                      </a:r>
+                    </a:p>
+                  </a:txBody>
+                  <a:tcPr>
+                    <a:solidFill>
+                      <a:srgbClr val="111827"/>
+                    </a:solidFill>
+                  </a:tcPr>
+                </a:tc>
+                <a:tc>
+                  <a:txBody>
+                    <a:bodyPr/>
+                    <a:lstStyle/>
+                    <a:p>
+                      <a:pPr>
+                        <a:defRPr sz="1100">
+                          <a:solidFill>
+                            <a:srgbClr val="F8FAFC"/>
+                          </a:solidFill>
+                        </a:defRPr>
+                      </a:pPr>
+                      <a:r>
+                        <a:t>Linear XAI attribution exposes exact token weights to user</a:t>
+                      </a:r>
+                    </a:p>
+                  </a:txBody>
+                  <a:tcPr>
+                    <a:solidFill>
+                      <a:srgbClr val="111827"/>
+                    </a:solidFill>
+                  </a:tcPr>
+                </a:tc>
+              </a:tr>
+            </a:tbl>
+          </a:graphicData>
+        </a:graphic>
+      </p:graphicFrame>
     </p:spTree>
   </p:cSld>
   <p:clrMapOvr>
@@ -3695,13 +6688,13 @@
         <p:spPr>
           <a:xfrm>
             <a:off x="0" y="0"/>
-            <a:ext cx="12191695" cy="1097280"/>
+            <a:ext cx="12191695" cy="6858000"/>
           </a:xfrm>
           <a:prstGeom prst="rect">
             <a:avLst/>
           </a:prstGeom>
           <a:solidFill>
-            <a:srgbClr val="0F172A"/>
+            <a:srgbClr val="090D16"/>
           </a:solidFill>
           <a:ln>
             <a:noFill/>
@@ -3737,8 +6730,8 @@
         </p:nvSpPr>
         <p:spPr>
           <a:xfrm>
-            <a:off x="731520" y="137160"/>
-            <a:ext cx="10698480" cy="822960"/>
+            <a:off x="731520" y="365760"/>
+            <a:ext cx="10728655" cy="1005840"/>
           </a:xfrm>
           <a:prstGeom prst="rect">
             <a:avLst/>
@@ -3752,184 +6745,370 @@
           <a:lstStyle/>
           <a:p>
             <a:pPr>
-              <a:defRPr sz="2400" b="1">
-                <a:solidFill>
-                  <a:srgbClr val="FFFFFF"/>
-                </a:solidFill>
-              </a:defRPr>
-            </a:pPr>
-            <a:r>
-              <a:t>3. System Architecture &amp; Workflow Pipeline</a:t>
-            </a:r>
-          </a:p>
-          <a:p>
-            <a:pPr>
-              <a:defRPr sz="1100">
-                <a:solidFill>
-                  <a:srgbClr val="94A3B8"/>
-                </a:solidFill>
-              </a:defRPr>
-            </a:pPr>
-            <a:r>
-              <a:t>Academic &amp; Industrial AI Project Series  |  Project 14 of 55</a:t>
-            </a:r>
-          </a:p>
-        </p:txBody>
-      </p:sp>
-      <p:sp>
-        <p:nvSpPr>
-          <p:cNvPr id="4" name="TextBox 3"/>
-          <p:cNvSpPr txBox="1"/>
+              <a:defRPr sz="1100" b="1">
+                <a:solidFill>
+                  <a:srgbClr val="6366F1"/>
+                </a:solidFill>
+              </a:defRPr>
+            </a:pPr>
+            <a:r>
+              <a:t>NLP &amp; EXPLAINABLE AI • VERIFICATION SUBSYSTEM</a:t>
+            </a:r>
+          </a:p>
+          <a:p>
+            <a:pPr>
+              <a:defRPr sz="2200" b="1">
+                <a:solidFill>
+                  <a:srgbClr val="F8FAFC"/>
+                </a:solidFill>
+              </a:defRPr>
+            </a:pPr>
+            <a:r>
+              <a:t>System Architecture: End-to-End NLP &amp; Explainable Attribution Pipeline</a:t>
+            </a:r>
+          </a:p>
+        </p:txBody>
+      </p:sp>
+      <p:sp>
+        <p:nvSpPr>
+          <p:cNvPr id="4" name="Rounded Rectangle 3"/>
+          <p:cNvSpPr/>
           <p:nvPr/>
         </p:nvSpPr>
         <p:spPr>
           <a:xfrm>
-            <a:off x="731520" y="1371600"/>
-            <a:ext cx="10698480" cy="5029200"/>
+            <a:off x="731520" y="1645920"/>
+            <a:ext cx="2560320" cy="4389120"/>
           </a:xfrm>
-          <a:prstGeom prst="rect">
+          <a:prstGeom prst="roundRect">
             <a:avLst/>
           </a:prstGeom>
-          <a:noFill/>
+          <a:solidFill>
+            <a:srgbClr val="111827"/>
+          </a:solidFill>
+          <a:ln w="19050">
+            <a:solidFill>
+              <a:srgbClr val="6366F1"/>
+            </a:solidFill>
+          </a:ln>
         </p:spPr>
-        <p:txBody>
-          <a:bodyPr wrap="square">
-            <a:spAutoFit/>
-          </a:bodyPr>
-          <a:lstStyle/>
-          <a:p>
-            <a:pPr>
-              <a:spcBef>
-                <a:spcPts val="800"/>
-              </a:spcBef>
-              <a:defRPr sz="1500" b="1">
-                <a:solidFill>
-                  <a:srgbClr val="2563EB"/>
-                </a:solidFill>
-              </a:defRPr>
-            </a:pPr>
-            <a:r>
-              <a:t>[1] Ingestion Layer</a:t>
-            </a:r>
-          </a:p>
-          <a:p>
-            <a:pPr>
-              <a:defRPr sz="1300">
-                <a:solidFill>
-                  <a:srgbClr val="475569"/>
-                </a:solidFill>
-              </a:defRPr>
-            </a:pPr>
-            <a:r>
-              <a:t>Raw telemetry, video feeds, or structured tabular features ingested via secure endpoints.</a:t>
-            </a:r>
-          </a:p>
-          <a:p>
-            <a:pPr>
-              <a:spcBef>
-                <a:spcPts val="800"/>
-              </a:spcBef>
-              <a:defRPr sz="1500" b="1">
-                <a:solidFill>
-                  <a:srgbClr val="2563EB"/>
-                </a:solidFill>
-              </a:defRPr>
-            </a:pPr>
-            <a:r>
-              <a:t>[2] Preprocessing &amp; Normalization</a:t>
-            </a:r>
-          </a:p>
-          <a:p>
-            <a:pPr>
-              <a:defRPr sz="1300">
-                <a:solidFill>
-                  <a:srgbClr val="475569"/>
-                </a:solidFill>
-              </a:defRPr>
-            </a:pPr>
-            <a:r>
-              <a:t>Feature scaling, missing value imputation, winsorization, and tensor reshaping.</a:t>
-            </a:r>
-          </a:p>
-          <a:p>
-            <a:pPr>
-              <a:spcBef>
-                <a:spcPts val="800"/>
-              </a:spcBef>
-              <a:defRPr sz="1500" b="1">
-                <a:solidFill>
-                  <a:srgbClr val="2563EB"/>
-                </a:solidFill>
-              </a:defRPr>
-            </a:pPr>
-            <a:r>
-              <a:t>[3] Deep Neural Inference Engine</a:t>
-            </a:r>
-          </a:p>
-          <a:p>
-            <a:pPr>
-              <a:defRPr sz="1300">
-                <a:solidFill>
-                  <a:srgbClr val="475569"/>
-                </a:solidFill>
-              </a:defRPr>
-            </a:pPr>
-            <a:r>
-              <a:t>Optimized model evaluating representations with GPU/MPS/CPU acceleration.</a:t>
-            </a:r>
-          </a:p>
-          <a:p>
-            <a:pPr>
-              <a:spcBef>
-                <a:spcPts val="800"/>
-              </a:spcBef>
-              <a:defRPr sz="1500" b="1">
-                <a:solidFill>
-                  <a:srgbClr val="2563EB"/>
-                </a:solidFill>
-              </a:defRPr>
-            </a:pPr>
-            <a:r>
-              <a:t>[4] Post-Processing &amp; Decision Support</a:t>
-            </a:r>
-          </a:p>
-          <a:p>
-            <a:pPr>
-              <a:defRPr sz="1300">
-                <a:solidFill>
-                  <a:srgbClr val="475569"/>
-                </a:solidFill>
-              </a:defRPr>
-            </a:pPr>
-            <a:r>
-              <a:t>Threshold calibration, confidence scoring, classification/regression output formatting.</a:t>
-            </a:r>
-          </a:p>
-          <a:p>
-            <a:pPr>
-              <a:spcBef>
-                <a:spcPts val="800"/>
-              </a:spcBef>
-              <a:defRPr sz="1500" b="1">
-                <a:solidFill>
-                  <a:srgbClr val="2563EB"/>
-                </a:solidFill>
-              </a:defRPr>
-            </a:pPr>
-            <a:r>
-              <a:t>[5] Visualization &amp; Persistence</a:t>
-            </a:r>
-          </a:p>
-          <a:p>
-            <a:pPr>
-              <a:defRPr sz="1300">
-                <a:solidFill>
-                  <a:srgbClr val="475569"/>
-                </a:solidFill>
-              </a:defRPr>
-            </a:pPr>
-            <a:r>
-              <a:t>Interactive UI dashboard rendering metrics and SQLite/PostgreSQL audit logging.</a:t>
+        <p:style>
+          <a:lnRef idx="1">
+            <a:schemeClr val="accent1"/>
+          </a:lnRef>
+          <a:fillRef idx="3">
+            <a:schemeClr val="accent1"/>
+          </a:fillRef>
+          <a:effectRef idx="2">
+            <a:schemeClr val="accent1"/>
+          </a:effectRef>
+          <a:fontRef idx="minor">
+            <a:schemeClr val="lt1"/>
+          </a:fontRef>
+        </p:style>
+        <p:txBody>
+          <a:bodyPr rtlCol="0" anchor="ctr" wrap="square"/>
+          <a:lstStyle/>
+          <a:p>
+            <a:pPr algn="ctr">
+              <a:defRPr sz="1400" b="1">
+                <a:solidFill>
+                  <a:srgbClr val="6366F1"/>
+                </a:solidFill>
+              </a:defRPr>
+            </a:pPr>
+            <a:r>
+              <a:t>1. Ingestion &amp; Sanitization</a:t>
+            </a:r>
+          </a:p>
+          <a:p>
+            <a:br/>
+            <a:pPr>
+              <a:defRPr sz="1100">
+                <a:solidFill>
+                  <a:srgbClr val="94A3B8"/>
+                </a:solidFill>
+              </a:defRPr>
+            </a:pPr>
+            <a:r>
+              <a:t>Raw News Headline / Article</a:t>
+            </a:r>
+            <a:br/>
+            <a:r>
+              <a:t>• URL/Pasted text input</a:t>
+            </a:r>
+            <a:br/>
+            <a:r>
+              <a:t>• Source-watermark regex detection</a:t>
+            </a:r>
+            <a:br/>
+            <a:r>
+              <a:t>• Optional Pure Language Mode</a:t>
+            </a:r>
+            <a:br/>
+            <a:r>
+              <a:t>• Publisher tag normalization</a:t>
+            </a:r>
+          </a:p>
+        </p:txBody>
+      </p:sp>
+      <p:sp>
+        <p:nvSpPr>
+          <p:cNvPr id="5" name="Rounded Rectangle 4"/>
+          <p:cNvSpPr/>
+          <p:nvPr/>
+        </p:nvSpPr>
+        <p:spPr>
+          <a:xfrm>
+            <a:off x="3429000" y="1645920"/>
+            <a:ext cx="2560320" cy="4389120"/>
+          </a:xfrm>
+          <a:prstGeom prst="roundRect">
+            <a:avLst/>
+          </a:prstGeom>
+          <a:solidFill>
+            <a:srgbClr val="111827"/>
+          </a:solidFill>
+          <a:ln w="19050">
+            <a:solidFill>
+              <a:srgbClr val="10B981"/>
+            </a:solidFill>
+          </a:ln>
+        </p:spPr>
+        <p:style>
+          <a:lnRef idx="1">
+            <a:schemeClr val="accent1"/>
+          </a:lnRef>
+          <a:fillRef idx="3">
+            <a:schemeClr val="accent1"/>
+          </a:fillRef>
+          <a:effectRef idx="2">
+            <a:schemeClr val="accent1"/>
+          </a:effectRef>
+          <a:fontRef idx="minor">
+            <a:schemeClr val="lt1"/>
+          </a:fontRef>
+        </p:style>
+        <p:txBody>
+          <a:bodyPr rtlCol="0" anchor="ctr" wrap="square"/>
+          <a:lstStyle/>
+          <a:p>
+            <a:pPr algn="ctr">
+              <a:defRPr sz="1400" b="1">
+                <a:solidFill>
+                  <a:srgbClr val="10B981"/>
+                </a:solidFill>
+              </a:defRPr>
+            </a:pPr>
+            <a:r>
+              <a:t>2. NLP Feature Extraction</a:t>
+            </a:r>
+          </a:p>
+          <a:p>
+            <a:br/>
+            <a:pPr>
+              <a:defRPr sz="1100">
+                <a:solidFill>
+                  <a:srgbClr val="94A3B8"/>
+                </a:solidFill>
+              </a:defRPr>
+            </a:pPr>
+            <a:r>
+              <a:t>Linguistic Preprocessing</a:t>
+            </a:r>
+            <a:br/>
+            <a:r>
+              <a:t>• Regex non-alpha stripping</a:t>
+            </a:r>
+            <a:br/>
+            <a:r>
+              <a:t>• NLTK word tokenization</a:t>
+            </a:r>
+            <a:br/>
+            <a:r>
+              <a:t>• Stopword filtration</a:t>
+            </a:r>
+            <a:br/>
+            <a:r>
+              <a:t>• WordNet morphological lemmatization</a:t>
+            </a:r>
+            <a:br/>
+            <a:r>
+              <a:t>• 146,627-dim TF-IDF mapping</a:t>
+            </a:r>
+          </a:p>
+        </p:txBody>
+      </p:sp>
+      <p:sp>
+        <p:nvSpPr>
+          <p:cNvPr id="6" name="Rounded Rectangle 5"/>
+          <p:cNvSpPr/>
+          <p:nvPr/>
+        </p:nvSpPr>
+        <p:spPr>
+          <a:xfrm>
+            <a:off x="6126480" y="1645920"/>
+            <a:ext cx="2560320" cy="4389120"/>
+          </a:xfrm>
+          <a:prstGeom prst="roundRect">
+            <a:avLst/>
+          </a:prstGeom>
+          <a:solidFill>
+            <a:srgbClr val="111827"/>
+          </a:solidFill>
+          <a:ln w="19050">
+            <a:solidFill>
+              <a:srgbClr val="F43F5E"/>
+            </a:solidFill>
+          </a:ln>
+        </p:spPr>
+        <p:style>
+          <a:lnRef idx="1">
+            <a:schemeClr val="accent1"/>
+          </a:lnRef>
+          <a:fillRef idx="3">
+            <a:schemeClr val="accent1"/>
+          </a:fillRef>
+          <a:effectRef idx="2">
+            <a:schemeClr val="accent1"/>
+          </a:effectRef>
+          <a:fontRef idx="minor">
+            <a:schemeClr val="lt1"/>
+          </a:fontRef>
+        </p:style>
+        <p:txBody>
+          <a:bodyPr rtlCol="0" anchor="ctr" wrap="square"/>
+          <a:lstStyle/>
+          <a:p>
+            <a:pPr algn="ctr">
+              <a:defRPr sz="1400" b="1">
+                <a:solidFill>
+                  <a:srgbClr val="F43F5E"/>
+                </a:solidFill>
+              </a:defRPr>
+            </a:pPr>
+            <a:r>
+              <a:t>3. Hyperplane Classifier</a:t>
+            </a:r>
+          </a:p>
+          <a:p>
+            <a:br/>
+            <a:pPr>
+              <a:defRPr sz="1100">
+                <a:solidFill>
+                  <a:srgbClr val="94A3B8"/>
+                </a:solidFill>
+              </a:defRPr>
+            </a:pPr>
+            <a:r>
+              <a:t>Passive-Aggressive ML</a:t>
+            </a:r>
+            <a:br/>
+            <a:r>
+              <a:t>• Margin computation: w·x + b</a:t>
+            </a:r>
+            <a:br/>
+            <a:r>
+              <a:t>• Hyperplane distance calculation</a:t>
+            </a:r>
+            <a:br/>
+            <a:r>
+              <a:t>• Sigmoid probability calibration</a:t>
+            </a:r>
+            <a:br/>
+            <a:r>
+              <a:t>• Dual Real vs Fake credibility scale</a:t>
+            </a:r>
+            <a:br/>
+            <a:r>
+              <a:t>• Dynamic decision thresholding</a:t>
+            </a:r>
+          </a:p>
+        </p:txBody>
+      </p:sp>
+      <p:sp>
+        <p:nvSpPr>
+          <p:cNvPr id="7" name="Rounded Rectangle 6"/>
+          <p:cNvSpPr/>
+          <p:nvPr/>
+        </p:nvSpPr>
+        <p:spPr>
+          <a:xfrm>
+            <a:off x="8823960" y="1645920"/>
+            <a:ext cx="2560320" cy="4389120"/>
+          </a:xfrm>
+          <a:prstGeom prst="roundRect">
+            <a:avLst/>
+          </a:prstGeom>
+          <a:solidFill>
+            <a:srgbClr val="111827"/>
+          </a:solidFill>
+          <a:ln w="19050">
+            <a:solidFill>
+              <a:srgbClr val="F59E0B"/>
+            </a:solidFill>
+          </a:ln>
+        </p:spPr>
+        <p:style>
+          <a:lnRef idx="1">
+            <a:schemeClr val="accent1"/>
+          </a:lnRef>
+          <a:fillRef idx="3">
+            <a:schemeClr val="accent1"/>
+          </a:fillRef>
+          <a:effectRef idx="2">
+            <a:schemeClr val="accent1"/>
+          </a:effectRef>
+          <a:fontRef idx="minor">
+            <a:schemeClr val="lt1"/>
+          </a:fontRef>
+        </p:style>
+        <p:txBody>
+          <a:bodyPr rtlCol="0" anchor="ctr" wrap="square"/>
+          <a:lstStyle/>
+          <a:p>
+            <a:pPr algn="ctr">
+              <a:defRPr sz="1400" b="1">
+                <a:solidFill>
+                  <a:srgbClr val="F59E0B"/>
+                </a:solidFill>
+              </a:defRPr>
+            </a:pPr>
+            <a:r>
+              <a:t>4. Explainable XAI &amp; Storage</a:t>
+            </a:r>
+          </a:p>
+          <a:p>
+            <a:br/>
+            <a:pPr>
+              <a:defRPr sz="1100">
+                <a:solidFill>
+                  <a:srgbClr val="94A3B8"/>
+                </a:solidFill>
+              </a:defRPr>
+            </a:pPr>
+            <a:r>
+              <a:t>Decision Transparency &amp; Audit</a:t>
+            </a:r>
+            <a:br/>
+            <a:r>
+              <a:t>• Token impact score w_i · x_i</a:t>
+            </a:r>
+            <a:br/>
+            <a:r>
+              <a:t>• Sensationalism radar index</a:t>
+            </a:r>
+            <a:br/>
+            <a:r>
+              <a:t>• Journalistic tone categorization</a:t>
+            </a:r>
+            <a:br/>
+            <a:r>
+              <a:t>• SQLite transactional logging</a:t>
+            </a:r>
+            <a:br/>
+            <a:r>
+              <a:t>• REST JSON &amp; Visual Dashboard</a:t>
             </a:r>
           </a:p>
         </p:txBody>
@@ -3961,13 +7140,13 @@
         <p:spPr>
           <a:xfrm>
             <a:off x="0" y="0"/>
-            <a:ext cx="12191695" cy="1097280"/>
+            <a:ext cx="12191695" cy="6858000"/>
           </a:xfrm>
           <a:prstGeom prst="rect">
             <a:avLst/>
           </a:prstGeom>
           <a:solidFill>
-            <a:srgbClr val="0F172A"/>
+            <a:srgbClr val="090D16"/>
           </a:solidFill>
           <a:ln>
             <a:noFill/>
@@ -4003,8 +7182,8 @@
         </p:nvSpPr>
         <p:spPr>
           <a:xfrm>
-            <a:off x="731520" y="137160"/>
-            <a:ext cx="10698480" cy="822960"/>
+            <a:off x="731520" y="365760"/>
+            <a:ext cx="10728655" cy="1005840"/>
           </a:xfrm>
           <a:prstGeom prst="rect">
             <a:avLst/>
@@ -4018,157 +7197,254 @@
           <a:lstStyle/>
           <a:p>
             <a:pPr>
-              <a:defRPr sz="2400" b="1">
-                <a:solidFill>
-                  <a:srgbClr val="FFFFFF"/>
-                </a:solidFill>
-              </a:defRPr>
-            </a:pPr>
-            <a:r>
-              <a:t>4. Deep Learning &amp; ML Methodology</a:t>
-            </a:r>
-          </a:p>
-          <a:p>
-            <a:pPr>
-              <a:defRPr sz="1100">
-                <a:solidFill>
-                  <a:srgbClr val="94A3B8"/>
-                </a:solidFill>
-              </a:defRPr>
-            </a:pPr>
-            <a:r>
-              <a:t>Academic &amp; Industrial AI Project Series  |  Project 14 of 55</a:t>
-            </a:r>
-          </a:p>
-        </p:txBody>
-      </p:sp>
-      <p:sp>
-        <p:nvSpPr>
-          <p:cNvPr id="4" name="TextBox 3"/>
-          <p:cNvSpPr txBox="1"/>
+              <a:defRPr sz="1100" b="1">
+                <a:solidFill>
+                  <a:srgbClr val="6366F1"/>
+                </a:solidFill>
+              </a:defRPr>
+            </a:pPr>
+            <a:r>
+              <a:t>NLP &amp; EXPLAINABLE AI • VERIFICATION SUBSYSTEM</a:t>
+            </a:r>
+          </a:p>
+          <a:p>
+            <a:pPr>
+              <a:defRPr sz="2200" b="1">
+                <a:solidFill>
+                  <a:srgbClr val="F8FAFC"/>
+                </a:solidFill>
+              </a:defRPr>
+            </a:pPr>
+            <a:r>
+              <a:t>Algorithmic Foundation: Passive-Aggressive Large-Margin Learning</a:t>
+            </a:r>
+          </a:p>
+        </p:txBody>
+      </p:sp>
+      <p:sp>
+        <p:nvSpPr>
+          <p:cNvPr id="4" name="Rounded Rectangle 3"/>
+          <p:cNvSpPr/>
           <p:nvPr/>
         </p:nvSpPr>
         <p:spPr>
           <a:xfrm>
-            <a:off x="731520" y="1371600"/>
-            <a:ext cx="10698480" cy="5029200"/>
+            <a:off x="731520" y="1645920"/>
+            <a:ext cx="5212080" cy="4572000"/>
           </a:xfrm>
-          <a:prstGeom prst="rect">
+          <a:prstGeom prst="roundRect">
             <a:avLst/>
           </a:prstGeom>
-          <a:noFill/>
+          <a:solidFill>
+            <a:srgbClr val="111827"/>
+          </a:solidFill>
+          <a:ln w="19050">
+            <a:solidFill>
+              <a:srgbClr val="6366F1"/>
+            </a:solidFill>
+          </a:ln>
         </p:spPr>
-        <p:txBody>
-          <a:bodyPr wrap="square">
-            <a:spAutoFit/>
-          </a:bodyPr>
-          <a:lstStyle/>
-          <a:p>
-            <a:pPr>
-              <a:spcBef>
-                <a:spcPts val="800"/>
-              </a:spcBef>
-              <a:defRPr sz="1500" b="1">
-                <a:solidFill>
-                  <a:srgbClr val="0F172A"/>
-                </a:solidFill>
-              </a:defRPr>
-            </a:pPr>
-            <a:r>
-              <a:t>• Feature Engineering &amp; Dimensionality Alignment</a:t>
-            </a:r>
-          </a:p>
-          <a:p>
-            <a:pPr>
-              <a:defRPr sz="1300">
-                <a:solidFill>
-                  <a:srgbClr val="475569"/>
-                </a:solidFill>
-              </a:defRPr>
-            </a:pPr>
-            <a:r>
-              <a:t>Domain-specific feature extraction, temporal windowing, and embedding vectors.</a:t>
-            </a:r>
-          </a:p>
-          <a:p>
-            <a:pPr>
-              <a:spcBef>
-                <a:spcPts val="800"/>
-              </a:spcBef>
-              <a:defRPr sz="1500" b="1">
-                <a:solidFill>
-                  <a:srgbClr val="0F172A"/>
-                </a:solidFill>
-              </a:defRPr>
-            </a:pPr>
-            <a:r>
-              <a:t>• Model Family &amp; Optimization</a:t>
-            </a:r>
-          </a:p>
-          <a:p>
-            <a:pPr>
-              <a:defRPr sz="1300">
-                <a:solidFill>
-                  <a:srgbClr val="475569"/>
-                </a:solidFill>
-              </a:defRPr>
-            </a:pPr>
-            <a:r>
-              <a:t>Ensemble gradient boosting or deep neural networks trained with AdamW and adaptive LR scheduling.</a:t>
-            </a:r>
-          </a:p>
-          <a:p>
-            <a:pPr>
-              <a:spcBef>
-                <a:spcPts val="800"/>
-              </a:spcBef>
-              <a:defRPr sz="1500" b="1">
-                <a:solidFill>
-                  <a:srgbClr val="0F172A"/>
-                </a:solidFill>
-              </a:defRPr>
-            </a:pPr>
-            <a:r>
-              <a:t>• Overfitting Mitigation</a:t>
-            </a:r>
-          </a:p>
-          <a:p>
-            <a:pPr>
-              <a:defRPr sz="1300">
-                <a:solidFill>
-                  <a:srgbClr val="475569"/>
-                </a:solidFill>
-              </a:defRPr>
-            </a:pPr>
-            <a:r>
-              <a:t>Stratified k-fold cross-validation, dropout layers, early stopping, and data augmentation.</a:t>
-            </a:r>
-          </a:p>
-          <a:p>
-            <a:pPr>
-              <a:spcBef>
-                <a:spcPts val="800"/>
-              </a:spcBef>
-              <a:defRPr sz="1500" b="1">
-                <a:solidFill>
-                  <a:srgbClr val="0F172A"/>
-                </a:solidFill>
-              </a:defRPr>
-            </a:pPr>
-            <a:r>
-              <a:t>• Explainability &amp; Auditability</a:t>
-            </a:r>
-          </a:p>
-          <a:p>
-            <a:pPr>
-              <a:defRPr sz="1300">
-                <a:solidFill>
-                  <a:srgbClr val="475569"/>
-                </a:solidFill>
-              </a:defRPr>
-            </a:pPr>
-            <a:r>
-              <a:t>Confidence scores and feature importance attributions for high-stakes decisions.</a:t>
+        <p:style>
+          <a:lnRef idx="1">
+            <a:schemeClr val="accent1"/>
+          </a:lnRef>
+          <a:fillRef idx="3">
+            <a:schemeClr val="accent1"/>
+          </a:fillRef>
+          <a:effectRef idx="2">
+            <a:schemeClr val="accent1"/>
+          </a:effectRef>
+          <a:fontRef idx="minor">
+            <a:schemeClr val="lt1"/>
+          </a:fontRef>
+        </p:style>
+        <p:txBody>
+          <a:bodyPr rtlCol="0" anchor="ctr" wrap="square"/>
+          <a:lstStyle/>
+          <a:p>
+            <a:pPr algn="ctr">
+              <a:defRPr sz="1600" b="1">
+                <a:solidFill>
+                  <a:srgbClr val="6366F1"/>
+                </a:solidFill>
+              </a:defRPr>
+            </a:pPr>
+            <a:r>
+              <a:t>Passive-Aggressive Online Optimization</a:t>
+            </a:r>
+          </a:p>
+          <a:p>
+            <a:pPr>
+              <a:defRPr sz="1200">
+                <a:solidFill>
+                  <a:srgbClr val="94A3B8"/>
+                </a:solidFill>
+              </a:defRPr>
+            </a:pPr>
+            <a:r>
+              <a:t>• Passive Step: If an example (x_t, y_t) is classified correctly with sufficient margin (y_t (w_t · x_t) &gt;= 1), the weight vector is left unaltered: w_{t+1} = w_t.</a:t>
+            </a:r>
+          </a:p>
+          <a:p>
+            <a:pPr>
+              <a:defRPr sz="1200">
+                <a:solidFill>
+                  <a:srgbClr val="94A3B8"/>
+                </a:solidFill>
+              </a:defRPr>
+            </a:pPr>
+            <a:r>
+              <a:t>• Aggressive Step: If loss is incurred (loss &gt; 0), the algorithm makes the minimum aggressive update required to satisfy the margin condition.</a:t>
+            </a:r>
+          </a:p>
+          <a:p>
+            <a:pPr>
+              <a:defRPr sz="1200">
+                <a:solidFill>
+                  <a:srgbClr val="94A3B8"/>
+                </a:solidFill>
+              </a:defRPr>
+            </a:pPr>
+            <a:r>
+              <a:t>• Hinge Loss Formulation: l_t(w) = max(0, 1 - y_t(w · x_t)).</a:t>
+            </a:r>
+          </a:p>
+          <a:p>
+            <a:pPr>
+              <a:defRPr sz="1200">
+                <a:solidFill>
+                  <a:srgbClr val="94A3B8"/>
+                </a:solidFill>
+              </a:defRPr>
+            </a:pPr>
+            <a:r>
+              <a:t>• Weight Update Rule: w_{t+1} = w_t + sign(y_t) · tau_t · x_t, where step size tau_t = l_t / (||x_t||^2 + 1/(2C)).</a:t>
+            </a:r>
+          </a:p>
+          <a:p>
+            <a:pPr>
+              <a:defRPr sz="1200">
+                <a:solidFill>
+                  <a:srgbClr val="94A3B8"/>
+                </a:solidFill>
+              </a:defRPr>
+            </a:pPr>
+            <a:r>
+              <a:t>• Regularization Parameter C: Enforces robustness against noisy labels and prevents overfitting on outlier vocabulary tokens.</a:t>
+            </a:r>
+          </a:p>
+        </p:txBody>
+      </p:sp>
+      <p:sp>
+        <p:nvSpPr>
+          <p:cNvPr id="5" name="Rounded Rectangle 4"/>
+          <p:cNvSpPr/>
+          <p:nvPr/>
+        </p:nvSpPr>
+        <p:spPr>
+          <a:xfrm>
+            <a:off x="6217920" y="1645920"/>
+            <a:ext cx="5212080" cy="4572000"/>
+          </a:xfrm>
+          <a:prstGeom prst="roundRect">
+            <a:avLst/>
+          </a:prstGeom>
+          <a:solidFill>
+            <a:srgbClr val="111827"/>
+          </a:solidFill>
+          <a:ln w="19050">
+            <a:solidFill>
+              <a:srgbClr val="10B981"/>
+            </a:solidFill>
+          </a:ln>
+        </p:spPr>
+        <p:style>
+          <a:lnRef idx="1">
+            <a:schemeClr val="accent1"/>
+          </a:lnRef>
+          <a:fillRef idx="3">
+            <a:schemeClr val="accent1"/>
+          </a:fillRef>
+          <a:effectRef idx="2">
+            <a:schemeClr val="accent1"/>
+          </a:effectRef>
+          <a:fontRef idx="minor">
+            <a:schemeClr val="lt1"/>
+          </a:fontRef>
+        </p:style>
+        <p:txBody>
+          <a:bodyPr rtlCol="0" anchor="ctr" wrap="square"/>
+          <a:lstStyle/>
+          <a:p>
+            <a:pPr algn="ctr">
+              <a:defRPr sz="1600" b="1">
+                <a:solidFill>
+                  <a:srgbClr val="10B981"/>
+                </a:solidFill>
+              </a:defRPr>
+            </a:pPr>
+            <a:r>
+              <a:t>Why Passive-Aggressive for Text Verification?</a:t>
+            </a:r>
+          </a:p>
+          <a:p>
+            <a:pPr>
+              <a:defRPr sz="1200">
+                <a:solidFill>
+                  <a:srgbClr val="94A3B8"/>
+                </a:solidFill>
+              </a:defRPr>
+            </a:pPr>
+            <a:r>
+              <a:t>• Massive Dimensionality: Perfectly suited for high-dimensional sparse TF-IDF spaces (146,627 features) without matrix inversion bottlenecks.</a:t>
+            </a:r>
+          </a:p>
+          <a:p>
+            <a:pPr>
+              <a:defRPr sz="1200">
+                <a:solidFill>
+                  <a:srgbClr val="94A3B8"/>
+                </a:solidFill>
+              </a:defRPr>
+            </a:pPr>
+            <a:r>
+              <a:t>• Rapid Online Convergence: Does not require iterative batch gradient epochs; updates sequentially with immediate boundary corrections.</a:t>
+            </a:r>
+          </a:p>
+          <a:p>
+            <a:pPr>
+              <a:defRPr sz="1200">
+                <a:solidFill>
+                  <a:srgbClr val="94A3B8"/>
+                </a:solidFill>
+              </a:defRPr>
+            </a:pPr>
+            <a:r>
+              <a:t>• Calibrated Margin Projection: The raw decision score d = w · x + b directly measures geometric distance to the separating hyperplane.</a:t>
+            </a:r>
+          </a:p>
+          <a:p>
+            <a:pPr>
+              <a:defRPr sz="1200">
+                <a:solidFill>
+                  <a:srgbClr val="94A3B8"/>
+                </a:solidFill>
+              </a:defRPr>
+            </a:pPr>
+            <a:r>
+              <a:t>• Dual-Spectrum Sigmoid Calibration: P(Fake) = 1 / (1 + exp(-clip(d, -12, 12))), yielding interpretable 0% to 100% confidence scores.</a:t>
+            </a:r>
+          </a:p>
+          <a:p>
+            <a:pPr>
+              <a:defRPr sz="1200">
+                <a:solidFill>
+                  <a:srgbClr val="94A3B8"/>
+                </a:solidFill>
+              </a:defRPr>
+            </a:pPr>
+            <a:r>
+              <a:t>• Zero Cold-Start Lag: Retains sub-millisecond evaluation throughput even under concurrent user request bursts.</a:t>
             </a:r>
           </a:p>
         </p:txBody>
@@ -4200,13 +7476,13 @@
         <p:spPr>
           <a:xfrm>
             <a:off x="0" y="0"/>
-            <a:ext cx="12191695" cy="1097280"/>
+            <a:ext cx="12191695" cy="6858000"/>
           </a:xfrm>
           <a:prstGeom prst="rect">
             <a:avLst/>
           </a:prstGeom>
           <a:solidFill>
-            <a:srgbClr val="0F172A"/>
+            <a:srgbClr val="090D16"/>
           </a:solidFill>
           <a:ln>
             <a:noFill/>
@@ -4242,8 +7518,8 @@
         </p:nvSpPr>
         <p:spPr>
           <a:xfrm>
-            <a:off x="731520" y="137160"/>
-            <a:ext cx="10698480" cy="822960"/>
+            <a:off x="731520" y="365760"/>
+            <a:ext cx="10728655" cy="1005840"/>
           </a:xfrm>
           <a:prstGeom prst="rect">
             <a:avLst/>
@@ -4257,109 +7533,356 @@
           <a:lstStyle/>
           <a:p>
             <a:pPr>
-              <a:defRPr sz="2400" b="1">
-                <a:solidFill>
-                  <a:srgbClr val="FFFFFF"/>
-                </a:solidFill>
-              </a:defRPr>
-            </a:pPr>
-            <a:r>
-              <a:t>5. Experimental Results &amp; Performance Benchmarks</a:t>
-            </a:r>
-          </a:p>
-          <a:p>
-            <a:pPr>
-              <a:defRPr sz="1100">
-                <a:solidFill>
-                  <a:srgbClr val="94A3B8"/>
-                </a:solidFill>
-              </a:defRPr>
-            </a:pPr>
-            <a:r>
-              <a:t>Academic &amp; Industrial AI Project Series  |  Project 14 of 55</a:t>
-            </a:r>
-          </a:p>
-        </p:txBody>
-      </p:sp>
-      <p:sp>
-        <p:nvSpPr>
-          <p:cNvPr id="4" name="TextBox 3"/>
-          <p:cNvSpPr txBox="1"/>
+              <a:defRPr sz="1100" b="1">
+                <a:solidFill>
+                  <a:srgbClr val="6366F1"/>
+                </a:solidFill>
+              </a:defRPr>
+            </a:pPr>
+            <a:r>
+              <a:t>NLP &amp; EXPLAINABLE AI • VERIFICATION SUBSYSTEM</a:t>
+            </a:r>
+          </a:p>
+          <a:p>
+            <a:pPr>
+              <a:defRPr sz="2200" b="1">
+                <a:solidFill>
+                  <a:srgbClr val="F8FAFC"/>
+                </a:solidFill>
+              </a:defRPr>
+            </a:pPr>
+            <a:r>
+              <a:t>Explainable AI (XAI): Linear Attribution &amp; Word-Level Impact Weights</a:t>
+            </a:r>
+          </a:p>
+        </p:txBody>
+      </p:sp>
+      <p:sp>
+        <p:nvSpPr>
+          <p:cNvPr id="4" name="Rounded Rectangle 3"/>
+          <p:cNvSpPr/>
           <p:nvPr/>
         </p:nvSpPr>
         <p:spPr>
           <a:xfrm>
-            <a:off x="731520" y="1371600"/>
-            <a:ext cx="10698480" cy="5029200"/>
+            <a:off x="731520" y="1645920"/>
+            <a:ext cx="3429000" cy="4572000"/>
           </a:xfrm>
-          <a:prstGeom prst="rect">
+          <a:prstGeom prst="roundRect">
             <a:avLst/>
           </a:prstGeom>
-          <a:noFill/>
+          <a:solidFill>
+            <a:srgbClr val="111827"/>
+          </a:solidFill>
+          <a:ln w="19050">
+            <a:solidFill>
+              <a:srgbClr val="6366F1"/>
+            </a:solidFill>
+          </a:ln>
         </p:spPr>
-        <p:txBody>
-          <a:bodyPr wrap="square">
-            <a:spAutoFit/>
-          </a:bodyPr>
-          <a:lstStyle/>
-          <a:p>
-            <a:pPr>
-              <a:spcBef>
-                <a:spcPts val="1200"/>
-              </a:spcBef>
-              <a:defRPr sz="1500" b="1">
+        <p:style>
+          <a:lnRef idx="1">
+            <a:schemeClr val="accent1"/>
+          </a:lnRef>
+          <a:fillRef idx="3">
+            <a:schemeClr val="accent1"/>
+          </a:fillRef>
+          <a:effectRef idx="2">
+            <a:schemeClr val="accent1"/>
+          </a:effectRef>
+          <a:fontRef idx="minor">
+            <a:schemeClr val="lt1"/>
+          </a:fontRef>
+        </p:style>
+        <p:txBody>
+          <a:bodyPr rtlCol="0" anchor="ctr" wrap="square"/>
+          <a:lstStyle/>
+          <a:p>
+            <a:pPr algn="ctr">
+              <a:defRPr sz="1600" b="1">
+                <a:solidFill>
+                  <a:srgbClr val="6366F1"/>
+                </a:solidFill>
+              </a:defRPr>
+            </a:pPr>
+            <a:r>
+              <a:t>Mathematical Attribution Formulation</a:t>
+            </a:r>
+          </a:p>
+          <a:p>
+            <a:pPr>
+              <a:defRPr sz="1200">
+                <a:solidFill>
+                  <a:srgbClr val="94A3B8"/>
+                </a:solidFill>
+              </a:defRPr>
+            </a:pPr>
+            <a:r>
+              <a:t>• Given trained weight vector w in R^V and TF-IDF representation x in R^V:</a:t>
+            </a:r>
+          </a:p>
+          <a:p>
+            <a:pPr>
+              <a:defRPr sz="1200">
+                <a:solidFill>
+                  <a:srgbClr val="94A3B8"/>
+                </a:solidFill>
+              </a:defRPr>
+            </a:pPr>
+            <a:r>
+              <a:t>• Decision Margin: d = sum_{i=1}^V (w_i · x_i) + b</a:t>
+            </a:r>
+          </a:p>
+          <a:p>
+            <a:pPr>
+              <a:defRPr sz="1200">
+                <a:solidFill>
+                  <a:srgbClr val="94A3B8"/>
+                </a:solidFill>
+              </a:defRPr>
+            </a:pPr>
+            <a:r>
+              <a:t>• Token Impact Score: phi_i = w_i · x_i</a:t>
+            </a:r>
+          </a:p>
+          <a:p>
+            <a:pPr>
+              <a:defRPr sz="1200">
+                <a:solidFill>
+                  <a:srgbClr val="94A3B8"/>
+                </a:solidFill>
+              </a:defRPr>
+            </a:pPr>
+            <a:r>
+              <a:t>• phi_i &gt; 0: Token exerts positive pressure pushing verdict toward FAKE.</a:t>
+            </a:r>
+          </a:p>
+          <a:p>
+            <a:pPr>
+              <a:defRPr sz="1200">
+                <a:solidFill>
+                  <a:srgbClr val="94A3B8"/>
+                </a:solidFill>
+              </a:defRPr>
+            </a:pPr>
+            <a:r>
+              <a:t>• phi_i &lt; 0: Token exerts negative pressure anchoring verdict toward REAL.</a:t>
+            </a:r>
+          </a:p>
+          <a:p>
+            <a:pPr>
+              <a:defRPr sz="1200">
+                <a:solidFill>
+                  <a:srgbClr val="94A3B8"/>
+                </a:solidFill>
+              </a:defRPr>
+            </a:pPr>
+            <a:r>
+              <a:t>• Zero Black-Box Obfuscation: Users see exact mathematical reasons for flagged headlines.</a:t>
+            </a:r>
+          </a:p>
+        </p:txBody>
+      </p:sp>
+      <p:sp>
+        <p:nvSpPr>
+          <p:cNvPr id="5" name="Rounded Rectangle 4"/>
+          <p:cNvSpPr/>
+          <p:nvPr/>
+        </p:nvSpPr>
+        <p:spPr>
+          <a:xfrm>
+            <a:off x="4343400" y="1645920"/>
+            <a:ext cx="3429000" cy="4572000"/>
+          </a:xfrm>
+          <a:prstGeom prst="roundRect">
+            <a:avLst/>
+          </a:prstGeom>
+          <a:solidFill>
+            <a:srgbClr val="111827"/>
+          </a:solidFill>
+          <a:ln w="19050">
+            <a:solidFill>
+              <a:srgbClr val="F43F5E"/>
+            </a:solidFill>
+          </a:ln>
+        </p:spPr>
+        <p:style>
+          <a:lnRef idx="1">
+            <a:schemeClr val="accent1"/>
+          </a:lnRef>
+          <a:fillRef idx="3">
+            <a:schemeClr val="accent1"/>
+          </a:fillRef>
+          <a:effectRef idx="2">
+            <a:schemeClr val="accent1"/>
+          </a:effectRef>
+          <a:fontRef idx="minor">
+            <a:schemeClr val="lt1"/>
+          </a:fontRef>
+        </p:style>
+        <p:txBody>
+          <a:bodyPr rtlCol="0" anchor="ctr" wrap="square"/>
+          <a:lstStyle/>
+          <a:p>
+            <a:pPr algn="ctr">
+              <a:defRPr sz="1600" b="1">
+                <a:solidFill>
+                  <a:srgbClr val="F43F5E"/>
+                </a:solidFill>
+              </a:defRPr>
+            </a:pPr>
+            <a:r>
+              <a:t>Visual Highlighting &amp; Token Color-Coding</a:t>
+            </a:r>
+          </a:p>
+          <a:p>
+            <a:pPr>
+              <a:defRPr sz="1200">
+                <a:solidFill>
+                  <a:srgbClr val="94A3B8"/>
+                </a:solidFill>
+              </a:defRPr>
+            </a:pPr>
+            <a:r>
+              <a:t>• Pill Highlighting: In-line text rendering wraps each token in interactive badges.</a:t>
+            </a:r>
+          </a:p>
+          <a:p>
+            <a:pPr>
+              <a:defRPr sz="1200">
+                <a:solidFill>
+                  <a:srgbClr val="94A3B8"/>
+                </a:solidFill>
+              </a:defRPr>
+            </a:pPr>
+            <a:r>
+              <a:t>• Rose Highlighting: Sensational words (e.g. 'bombshell' +1.84, 'secret' +1.52).</a:t>
+            </a:r>
+          </a:p>
+          <a:p>
+            <a:pPr>
+              <a:defRPr sz="1200">
+                <a:solidFill>
+                  <a:srgbClr val="94A3B8"/>
+                </a:solidFill>
+              </a:defRPr>
+            </a:pPr>
+            <a:r>
+              <a:t>• Emerald Highlighting: Institutional words (e.g. 'official' -1.08, 'wednesday' -1.23).</a:t>
+            </a:r>
+          </a:p>
+          <a:p>
+            <a:pPr>
+              <a:defRPr sz="1200">
+                <a:solidFill>
+                  <a:srgbClr val="94A3B8"/>
+                </a:solidFill>
+              </a:defRPr>
+            </a:pPr>
+            <a:r>
+              <a:t>• Neutral Badging: Stopwords and unweighted contextual connectors.</a:t>
+            </a:r>
+          </a:p>
+          <a:p>
+            <a:pPr>
+              <a:defRPr sz="1200">
+                <a:solidFill>
+                  <a:srgbClr val="94A3B8"/>
+                </a:solidFill>
+              </a:defRPr>
+            </a:pPr>
+            <a:r>
+              <a:t>• Hover Tooltips: Display exact TF-IDF frequency, model weight, and relative impact.</a:t>
+            </a:r>
+          </a:p>
+        </p:txBody>
+      </p:sp>
+      <p:sp>
+        <p:nvSpPr>
+          <p:cNvPr id="6" name="Rounded Rectangle 5"/>
+          <p:cNvSpPr/>
+          <p:nvPr/>
+        </p:nvSpPr>
+        <p:spPr>
+          <a:xfrm>
+            <a:off x="7955280" y="1645920"/>
+            <a:ext cx="3429000" cy="4572000"/>
+          </a:xfrm>
+          <a:prstGeom prst="roundRect">
+            <a:avLst/>
+          </a:prstGeom>
+          <a:solidFill>
+            <a:srgbClr val="111827"/>
+          </a:solidFill>
+          <a:ln w="19050">
+            <a:solidFill>
+              <a:srgbClr val="10B981"/>
+            </a:solidFill>
+          </a:ln>
+        </p:spPr>
+        <p:style>
+          <a:lnRef idx="1">
+            <a:schemeClr val="accent1"/>
+          </a:lnRef>
+          <a:fillRef idx="3">
+            <a:schemeClr val="accent1"/>
+          </a:fillRef>
+          <a:effectRef idx="2">
+            <a:schemeClr val="accent1"/>
+          </a:effectRef>
+          <a:fontRef idx="minor">
+            <a:schemeClr val="lt1"/>
+          </a:fontRef>
+        </p:style>
+        <p:txBody>
+          <a:bodyPr rtlCol="0" anchor="ctr" wrap="square"/>
+          <a:lstStyle/>
+          <a:p>
+            <a:pPr algn="ctr">
+              <a:defRPr sz="1600" b="1">
                 <a:solidFill>
                   <a:srgbClr val="10B981"/>
                 </a:solidFill>
               </a:defRPr>
             </a:pPr>
             <a:r>
-              <a:t>★ Validation Accuracy / Score: Achieved 94.8% on independent validation test holdout partitions.</a:t>
-            </a:r>
-          </a:p>
-          <a:p>
-            <a:pPr>
-              <a:spcBef>
-                <a:spcPts val="1200"/>
-              </a:spcBef>
-              <a:defRPr sz="1500" b="1">
-                <a:solidFill>
-                  <a:srgbClr val="10B981"/>
-                </a:solidFill>
-              </a:defRPr>
-            </a:pPr>
-            <a:r>
-              <a:t>★ F1-Score / Macro Precision: Balanced metric of 0.932 across positive and negative classification targets.</a:t>
-            </a:r>
-          </a:p>
-          <a:p>
-            <a:pPr>
-              <a:spcBef>
-                <a:spcPts val="1200"/>
-              </a:spcBef>
-              <a:defRPr sz="1500" b="1">
-                <a:solidFill>
-                  <a:srgbClr val="10B981"/>
-                </a:solidFill>
-              </a:defRPr>
-            </a:pPr>
-            <a:r>
-              <a:t>★ Inference Latency Profile: Median latency of 18.4 ms per inference query on edge CPU hardware.</a:t>
-            </a:r>
-          </a:p>
-          <a:p>
-            <a:pPr>
-              <a:spcBef>
-                <a:spcPts val="1200"/>
-              </a:spcBef>
-              <a:defRPr sz="1500" b="1">
-                <a:solidFill>
-                  <a:srgbClr val="10B981"/>
-                </a:solidFill>
-              </a:defRPr>
-            </a:pPr>
-            <a:r>
-              <a:t>★ False Positive Rate (FPR): Maintained below 2.8%, satisfying stringent operational false alarm constraints.</a:t>
+              <a:t>Auditing Against Adversarial Poisoning</a:t>
+            </a:r>
+          </a:p>
+          <a:p>
+            <a:pPr>
+              <a:defRPr sz="1200">
+                <a:solidFill>
+                  <a:srgbClr val="94A3B8"/>
+                </a:solidFill>
+              </a:defRPr>
+            </a:pPr>
+            <a:r>
+              <a:t>• Identifies keyword stuffing attacks where adversaries inject credible words into bogus text.</a:t>
+            </a:r>
+          </a:p>
+          <a:p>
+            <a:pPr>
+              <a:defRPr sz="1200">
+                <a:solidFill>
+                  <a:srgbClr val="94A3B8"/>
+                </a:solidFill>
+              </a:defRPr>
+            </a:pPr>
+            <a:r>
+              <a:t>• Identifies spurious correlations: If a benign city name has high weight due to training bias, XAI reveals it immediately.</a:t>
+            </a:r>
+          </a:p>
+          <a:p>
+            <a:pPr>
+              <a:defRPr sz="1200">
+                <a:solidFill>
+                  <a:srgbClr val="94A3B8"/>
+                </a:solidFill>
+              </a:defRPr>
+            </a:pPr>
+            <a:r>
+              <a:t>• Enables academic and journalistic oversight before any content moderation action is taken.</a:t>
             </a:r>
           </a:p>
         </p:txBody>
@@ -4391,13 +7914,13 @@
         <p:spPr>
           <a:xfrm>
             <a:off x="0" y="0"/>
-            <a:ext cx="12191695" cy="1097280"/>
+            <a:ext cx="12191695" cy="6858000"/>
           </a:xfrm>
           <a:prstGeom prst="rect">
             <a:avLst/>
           </a:prstGeom>
           <a:solidFill>
-            <a:srgbClr val="0F172A"/>
+            <a:srgbClr val="090D16"/>
           </a:solidFill>
           <a:ln>
             <a:noFill/>
@@ -4433,8 +7956,8 @@
         </p:nvSpPr>
         <p:spPr>
           <a:xfrm>
-            <a:off x="731520" y="137160"/>
-            <a:ext cx="10698480" cy="822960"/>
+            <a:off x="731520" y="365760"/>
+            <a:ext cx="10728655" cy="1005840"/>
           </a:xfrm>
           <a:prstGeom prst="rect">
             <a:avLst/>
@@ -4448,157 +7971,294 @@
           <a:lstStyle/>
           <a:p>
             <a:pPr>
-              <a:defRPr sz="2400" b="1">
-                <a:solidFill>
-                  <a:srgbClr val="FFFFFF"/>
-                </a:solidFill>
-              </a:defRPr>
-            </a:pPr>
-            <a:r>
-              <a:t>6. Technology Stack &amp; Production Deployment</a:t>
-            </a:r>
-          </a:p>
-          <a:p>
-            <a:pPr>
-              <a:defRPr sz="1100">
-                <a:solidFill>
-                  <a:srgbClr val="94A3B8"/>
-                </a:solidFill>
-              </a:defRPr>
-            </a:pPr>
-            <a:r>
-              <a:t>Academic &amp; Industrial AI Project Series  |  Project 14 of 55</a:t>
-            </a:r>
-          </a:p>
-        </p:txBody>
-      </p:sp>
-      <p:sp>
-        <p:nvSpPr>
-          <p:cNvPr id="4" name="TextBox 3"/>
-          <p:cNvSpPr txBox="1"/>
+              <a:defRPr sz="1100" b="1">
+                <a:solidFill>
+                  <a:srgbClr val="6366F1"/>
+                </a:solidFill>
+              </a:defRPr>
+            </a:pPr>
+            <a:r>
+              <a:t>NLP &amp; EXPLAINABLE AI • VERIFICATION SUBSYSTEM</a:t>
+            </a:r>
+          </a:p>
+          <a:p>
+            <a:pPr>
+              <a:defRPr sz="2200" b="1">
+                <a:solidFill>
+                  <a:srgbClr val="F8FAFC"/>
+                </a:solidFill>
+              </a:defRPr>
+            </a:pPr>
+            <a:r>
+              <a:t>Linguistic Stylometry: 4 Intuitive Human-Cognitive Signal Radars</a:t>
+            </a:r>
+          </a:p>
+        </p:txBody>
+      </p:sp>
+      <p:sp>
+        <p:nvSpPr>
+          <p:cNvPr id="4" name="Rounded Rectangle 3"/>
+          <p:cNvSpPr/>
           <p:nvPr/>
         </p:nvSpPr>
         <p:spPr>
           <a:xfrm>
-            <a:off x="731520" y="1371600"/>
-            <a:ext cx="10698480" cy="5029200"/>
+            <a:off x="731520" y="1645920"/>
+            <a:ext cx="2560320" cy="4389120"/>
           </a:xfrm>
-          <a:prstGeom prst="rect">
+          <a:prstGeom prst="roundRect">
             <a:avLst/>
           </a:prstGeom>
-          <a:noFill/>
+          <a:solidFill>
+            <a:srgbClr val="111827"/>
+          </a:solidFill>
+          <a:ln w="19050">
+            <a:solidFill>
+              <a:srgbClr val="F43F5E"/>
+            </a:solidFill>
+          </a:ln>
         </p:spPr>
-        <p:txBody>
-          <a:bodyPr wrap="square">
-            <a:spAutoFit/>
-          </a:bodyPr>
-          <a:lstStyle/>
-          <a:p>
-            <a:pPr>
-              <a:spcBef>
-                <a:spcPts val="800"/>
-              </a:spcBef>
+        <p:style>
+          <a:lnRef idx="1">
+            <a:schemeClr val="accent1"/>
+          </a:lnRef>
+          <a:fillRef idx="3">
+            <a:schemeClr val="accent1"/>
+          </a:fillRef>
+          <a:effectRef idx="2">
+            <a:schemeClr val="accent1"/>
+          </a:effectRef>
+          <a:fontRef idx="minor">
+            <a:schemeClr val="lt1"/>
+          </a:fontRef>
+        </p:style>
+        <p:txBody>
+          <a:bodyPr rtlCol="0" anchor="ctr" wrap="square"/>
+          <a:lstStyle/>
+          <a:p>
+            <a:pPr algn="ctr">
               <a:defRPr sz="1500" b="1">
                 <a:solidFill>
-                  <a:srgbClr val="1E3A8A"/>
-                </a:solidFill>
-              </a:defRPr>
-            </a:pPr>
-            <a:r>
-              <a:t>⚙ Core Machine Learning Framework</a:t>
-            </a:r>
-          </a:p>
-          <a:p>
-            <a:pPr>
-              <a:defRPr sz="1300">
-                <a:solidFill>
-                  <a:srgbClr val="475569"/>
-                </a:solidFill>
-              </a:defRPr>
-            </a:pPr>
-            <a:r>
-              <a:t>PyTorch 2.0+ / Scikit-learn / HuggingFace Transformers / OpenCV</a:t>
-            </a:r>
-          </a:p>
-          <a:p>
-            <a:pPr>
-              <a:spcBef>
-                <a:spcPts val="800"/>
-              </a:spcBef>
+                  <a:srgbClr val="F43F5E"/>
+                </a:solidFill>
+              </a:defRPr>
+            </a:pPr>
+            <a:r>
+              <a:t>Sensationalism Radar</a:t>
+            </a:r>
+          </a:p>
+          <a:p>
+            <a:br/>
+            <a:pPr>
+              <a:defRPr sz="1200">
+                <a:solidFill>
+                  <a:srgbClr val="94A3B8"/>
+                </a:solidFill>
+              </a:defRPr>
+            </a:pPr>
+            <a:r>
+              <a:t>Detects urgent, shock-inducing clickbait lexemes (e.g., 'shocking', 'miracle', 'hoax', 'banned', 'conspiracy', 'mindblowing'). Outputs normalized 0-100 severity index.</a:t>
+            </a:r>
+          </a:p>
+        </p:txBody>
+      </p:sp>
+      <p:sp>
+        <p:nvSpPr>
+          <p:cNvPr id="5" name="Rounded Rectangle 4"/>
+          <p:cNvSpPr/>
+          <p:nvPr/>
+        </p:nvSpPr>
+        <p:spPr>
+          <a:xfrm>
+            <a:off x="3429000" y="1645920"/>
+            <a:ext cx="2560320" cy="4389120"/>
+          </a:xfrm>
+          <a:prstGeom prst="roundRect">
+            <a:avLst/>
+          </a:prstGeom>
+          <a:solidFill>
+            <a:srgbClr val="111827"/>
+          </a:solidFill>
+          <a:ln w="19050">
+            <a:solidFill>
+              <a:srgbClr val="F59E0B"/>
+            </a:solidFill>
+          </a:ln>
+        </p:spPr>
+        <p:style>
+          <a:lnRef idx="1">
+            <a:schemeClr val="accent1"/>
+          </a:lnRef>
+          <a:fillRef idx="3">
+            <a:schemeClr val="accent1"/>
+          </a:fillRef>
+          <a:effectRef idx="2">
+            <a:schemeClr val="accent1"/>
+          </a:effectRef>
+          <a:fontRef idx="minor">
+            <a:schemeClr val="lt1"/>
+          </a:fontRef>
+        </p:style>
+        <p:txBody>
+          <a:bodyPr rtlCol="0" anchor="ctr" wrap="square"/>
+          <a:lstStyle/>
+          <a:p>
+            <a:pPr algn="ctr">
               <a:defRPr sz="1500" b="1">
                 <a:solidFill>
-                  <a:srgbClr val="1E3A8A"/>
-                </a:solidFill>
-              </a:defRPr>
-            </a:pPr>
-            <a:r>
-              <a:t>⚙ Asynchronous REST Backend</a:t>
-            </a:r>
-          </a:p>
-          <a:p>
-            <a:pPr>
-              <a:defRPr sz="1300">
-                <a:solidFill>
-                  <a:srgbClr val="475569"/>
-                </a:solidFill>
-              </a:defRPr>
-            </a:pPr>
-            <a:r>
-              <a:t>FastAPI / Uvicorn ASGI Server / Pydantic V2 Type Safety</a:t>
-            </a:r>
-          </a:p>
-          <a:p>
-            <a:pPr>
-              <a:spcBef>
-                <a:spcPts val="800"/>
-              </a:spcBef>
+                  <a:srgbClr val="F59E0B"/>
+                </a:solidFill>
+              </a:defRPr>
+            </a:pPr>
+            <a:r>
+              <a:t>Speculative Framing</a:t>
+            </a:r>
+          </a:p>
+          <a:p>
+            <a:br/>
+            <a:pPr>
+              <a:defRPr sz="1200">
+                <a:solidFill>
+                  <a:srgbClr val="94A3B8"/>
+                </a:solidFill>
+              </a:defRPr>
+            </a:pPr>
+            <a:r>
+              <a:t>Identifies unverified hearsay qualifiers (e.g., 'claims', 'allegedly', 'rumors', 'reportedly', 'sources suggest', 'supposedly'). Differentiates verified facts from speculation.</a:t>
+            </a:r>
+          </a:p>
+        </p:txBody>
+      </p:sp>
+      <p:sp>
+        <p:nvSpPr>
+          <p:cNvPr id="6" name="Rounded Rectangle 5"/>
+          <p:cNvSpPr/>
+          <p:nvPr/>
+        </p:nvSpPr>
+        <p:spPr>
+          <a:xfrm>
+            <a:off x="6126480" y="1645920"/>
+            <a:ext cx="2560320" cy="4389120"/>
+          </a:xfrm>
+          <a:prstGeom prst="roundRect">
+            <a:avLst/>
+          </a:prstGeom>
+          <a:solidFill>
+            <a:srgbClr val="111827"/>
+          </a:solidFill>
+          <a:ln w="19050">
+            <a:solidFill>
+              <a:srgbClr val="6366F1"/>
+            </a:solidFill>
+          </a:ln>
+        </p:spPr>
+        <p:style>
+          <a:lnRef idx="1">
+            <a:schemeClr val="accent1"/>
+          </a:lnRef>
+          <a:fillRef idx="3">
+            <a:schemeClr val="accent1"/>
+          </a:fillRef>
+          <a:effectRef idx="2">
+            <a:schemeClr val="accent1"/>
+          </a:effectRef>
+          <a:fontRef idx="minor">
+            <a:schemeClr val="lt1"/>
+          </a:fontRef>
+        </p:style>
+        <p:txBody>
+          <a:bodyPr rtlCol="0" anchor="ctr" wrap="square"/>
+          <a:lstStyle/>
+          <a:p>
+            <a:pPr algn="ctr">
               <a:defRPr sz="1500" b="1">
                 <a:solidFill>
-                  <a:srgbClr val="1E3A8A"/>
-                </a:solidFill>
-              </a:defRPr>
-            </a:pPr>
-            <a:r>
-              <a:t>⚙ Data Persistence &amp; Storage</a:t>
-            </a:r>
-          </a:p>
-          <a:p>
-            <a:pPr>
-              <a:defRPr sz="1300">
-                <a:solidFill>
-                  <a:srgbClr val="475569"/>
-                </a:solidFill>
-              </a:defRPr>
-            </a:pPr>
-            <a:r>
-              <a:t>SQLite / PostgreSQL with transactional integrity &amp; audit trail</a:t>
-            </a:r>
-          </a:p>
-          <a:p>
-            <a:pPr>
-              <a:spcBef>
-                <a:spcPts val="800"/>
-              </a:spcBef>
+                  <a:srgbClr val="6366F1"/>
+                </a:solidFill>
+              </a:defRPr>
+            </a:pPr>
+            <a:r>
+              <a:t>Formatting Hysteria</a:t>
+            </a:r>
+          </a:p>
+          <a:p>
+            <a:br/>
+            <a:pPr>
+              <a:defRPr sz="1200">
+                <a:solidFill>
+                  <a:srgbClr val="94A3B8"/>
+                </a:solidFill>
+              </a:defRPr>
+            </a:pPr>
+            <a:r>
+              <a:t>Measures syntactic screaming indicators: Uppercase character ratio (% CAPS), multiple exclamation marks (!!), and rhetorical question clusters (??).</a:t>
+            </a:r>
+          </a:p>
+        </p:txBody>
+      </p:sp>
+      <p:sp>
+        <p:nvSpPr>
+          <p:cNvPr id="7" name="Rounded Rectangle 6"/>
+          <p:cNvSpPr/>
+          <p:nvPr/>
+        </p:nvSpPr>
+        <p:spPr>
+          <a:xfrm>
+            <a:off x="8823960" y="1645920"/>
+            <a:ext cx="2560320" cy="4389120"/>
+          </a:xfrm>
+          <a:prstGeom prst="roundRect">
+            <a:avLst/>
+          </a:prstGeom>
+          <a:solidFill>
+            <a:srgbClr val="111827"/>
+          </a:solidFill>
+          <a:ln w="19050">
+            <a:solidFill>
+              <a:srgbClr val="10B981"/>
+            </a:solidFill>
+          </a:ln>
+        </p:spPr>
+        <p:style>
+          <a:lnRef idx="1">
+            <a:schemeClr val="accent1"/>
+          </a:lnRef>
+          <a:fillRef idx="3">
+            <a:schemeClr val="accent1"/>
+          </a:fillRef>
+          <a:effectRef idx="2">
+            <a:schemeClr val="accent1"/>
+          </a:effectRef>
+          <a:fontRef idx="minor">
+            <a:schemeClr val="lt1"/>
+          </a:fontRef>
+        </p:style>
+        <p:txBody>
+          <a:bodyPr rtlCol="0" anchor="ctr" wrap="square"/>
+          <a:lstStyle/>
+          <a:p>
+            <a:pPr algn="ctr">
               <a:defRPr sz="1500" b="1">
                 <a:solidFill>
-                  <a:srgbClr val="1E3A8A"/>
-                </a:solidFill>
-              </a:defRPr>
-            </a:pPr>
-            <a:r>
-              <a:t>⚙ Interactive Frontend Layer</a:t>
-            </a:r>
-          </a:p>
-          <a:p>
-            <a:pPr>
-              <a:defRPr sz="1300">
-                <a:solidFill>
-                  <a:srgbClr val="475569"/>
-                </a:solidFill>
-              </a:defRPr>
-            </a:pPr>
-            <a:r>
-              <a:t>Modern Responsive Web Portal (HTML5, Tailwind/CSS, JavaScript ES6+)</a:t>
+                  <a:srgbClr val="10B981"/>
+                </a:solidFill>
+              </a:defRPr>
+            </a:pPr>
+            <a:r>
+              <a:t>Information Density</a:t>
+            </a:r>
+          </a:p>
+          <a:p>
+            <a:br/>
+            <a:pPr>
+              <a:defRPr sz="1200">
+                <a:solidFill>
+                  <a:srgbClr val="94A3B8"/>
+                </a:solidFill>
+              </a:defRPr>
+            </a:pPr>
+            <a:r>
+              <a:t>Quantifies syntactic substance: Total word count vs NLTK lemmatized vocabulary tokens. Flags low-density clickbait that relies on emotional triggers rather than data.</a:t>
             </a:r>
           </a:p>
         </p:txBody>
@@ -4630,13 +8290,13 @@
         <p:spPr>
           <a:xfrm>
             <a:off x="0" y="0"/>
-            <a:ext cx="12191695" cy="1097280"/>
+            <a:ext cx="12191695" cy="6858000"/>
           </a:xfrm>
           <a:prstGeom prst="rect">
             <a:avLst/>
           </a:prstGeom>
           <a:solidFill>
-            <a:srgbClr val="0F172A"/>
+            <a:srgbClr val="090D16"/>
           </a:solidFill>
           <a:ln>
             <a:noFill/>
@@ -4672,8 +8332,8 @@
         </p:nvSpPr>
         <p:spPr>
           <a:xfrm>
-            <a:off x="731520" y="137160"/>
-            <a:ext cx="10698480" cy="822960"/>
+            <a:off x="731520" y="365760"/>
+            <a:ext cx="10728655" cy="1005840"/>
           </a:xfrm>
           <a:prstGeom prst="rect">
             <a:avLst/>
@@ -4687,14 +8347,104 @@
           <a:lstStyle/>
           <a:p>
             <a:pPr>
-              <a:defRPr sz="2400" b="1">
-                <a:solidFill>
-                  <a:srgbClr val="FFFFFF"/>
-                </a:solidFill>
-              </a:defRPr>
-            </a:pPr>
-            <a:r>
-              <a:t>7. Conclusion &amp; Future Roadmap</a:t>
+              <a:defRPr sz="1100" b="1">
+                <a:solidFill>
+                  <a:srgbClr val="6366F1"/>
+                </a:solidFill>
+              </a:defRPr>
+            </a:pPr>
+            <a:r>
+              <a:t>SYSTEM VERIFICATION &amp; LIVE TELEMETRY • SLIDE 8</a:t>
+            </a:r>
+          </a:p>
+          <a:p>
+            <a:pPr>
+              <a:defRPr sz="2200" b="1">
+                <a:solidFill>
+                  <a:srgbClr val="F8FAFC"/>
+                </a:solidFill>
+              </a:defRPr>
+            </a:pPr>
+            <a:r>
+              <a:t>Live UI: Executive Landing Page &amp; Platform Overview</a:t>
+            </a:r>
+          </a:p>
+        </p:txBody>
+      </p:sp>
+      <p:pic>
+        <p:nvPicPr>
+          <p:cNvPr id="4" name="Picture 3" descr="01_landing_hero.png"/>
+          <p:cNvPicPr>
+            <a:picLocks noChangeAspect="1"/>
+          </p:cNvPicPr>
+          <p:nvPr/>
+        </p:nvPicPr>
+        <p:blipFill>
+          <a:blip r:embed="rId2"/>
+          <a:stretch>
+            <a:fillRect/>
+          </a:stretch>
+        </p:blipFill>
+        <p:spPr>
+          <a:xfrm>
+            <a:off x="731520" y="1645920"/>
+            <a:ext cx="6949440" cy="4389120"/>
+          </a:xfrm>
+          <a:prstGeom prst="rect">
+            <a:avLst/>
+          </a:prstGeom>
+        </p:spPr>
+      </p:pic>
+      <p:sp>
+        <p:nvSpPr>
+          <p:cNvPr id="5" name="Rounded Rectangle 4"/>
+          <p:cNvSpPr/>
+          <p:nvPr/>
+        </p:nvSpPr>
+        <p:spPr>
+          <a:xfrm>
+            <a:off x="7955279" y="1645920"/>
+            <a:ext cx="3474720" cy="4389120"/>
+          </a:xfrm>
+          <a:prstGeom prst="roundRect">
+            <a:avLst/>
+          </a:prstGeom>
+          <a:solidFill>
+            <a:srgbClr val="111827"/>
+          </a:solidFill>
+          <a:ln w="19050">
+            <a:solidFill>
+              <a:srgbClr val="6366F1"/>
+            </a:solidFill>
+          </a:ln>
+        </p:spPr>
+        <p:style>
+          <a:lnRef idx="1">
+            <a:schemeClr val="accent1"/>
+          </a:lnRef>
+          <a:fillRef idx="3">
+            <a:schemeClr val="accent1"/>
+          </a:fillRef>
+          <a:effectRef idx="2">
+            <a:schemeClr val="accent1"/>
+          </a:effectRef>
+          <a:fontRef idx="minor">
+            <a:schemeClr val="lt1"/>
+          </a:fontRef>
+        </p:style>
+        <p:txBody>
+          <a:bodyPr rtlCol="0" anchor="ctr" wrap="square"/>
+          <a:lstStyle/>
+          <a:p>
+            <a:pPr algn="ctr">
+              <a:defRPr sz="1500" b="1">
+                <a:solidFill>
+                  <a:srgbClr val="6366F1"/>
+                </a:solidFill>
+              </a:defRPr>
+            </a:pPr>
+            <a:r>
+              <a:t>VeriNews AI Portal</a:t>
             </a:r>
           </a:p>
           <a:p>
@@ -4706,21 +8456,118 @@
               </a:defRPr>
             </a:pPr>
             <a:r>
-              <a:t>Academic &amp; Industrial AI Project Series  |  Project 14 of 55</a:t>
-            </a:r>
-          </a:p>
-        </p:txBody>
-      </p:sp>
-      <p:sp>
-        <p:nvSpPr>
-          <p:cNvPr id="4" name="TextBox 3"/>
+              <a:t>• Landing page on http://127.0.0.1:5014/ featuring dark cyber-slate aesthetic.</a:t>
+            </a:r>
+          </a:p>
+          <a:p>
+            <a:pPr>
+              <a:defRPr sz="1100">
+                <a:solidFill>
+                  <a:srgbClr val="94A3B8"/>
+                </a:solidFill>
+              </a:defRPr>
+            </a:pPr>
+            <a:r>
+              <a:t>• Highlights 96.2% Kaggle validation accuracy with Passive-Aggressive Classifier.</a:t>
+            </a:r>
+          </a:p>
+          <a:p>
+            <a:pPr>
+              <a:defRPr sz="1100">
+                <a:solidFill>
+                  <a:srgbClr val="94A3B8"/>
+                </a:solidFill>
+              </a:defRPr>
+            </a:pPr>
+            <a:r>
+              <a:t>• One-click action routes users directly to the real-time visualizer console.</a:t>
+            </a:r>
+          </a:p>
+          <a:p>
+            <a:pPr>
+              <a:defRPr sz="1100">
+                <a:solidFill>
+                  <a:srgbClr val="94A3B8"/>
+                </a:solidFill>
+              </a:defRPr>
+            </a:pPr>
+            <a:r>
+              <a:t>• Full-stack responsive design built with Tailwind CSS and FontAwesome typography.</a:t>
+            </a:r>
+          </a:p>
+        </p:txBody>
+      </p:sp>
+    </p:spTree>
+  </p:cSld>
+  <p:clrMapOvr>
+    <a:masterClrMapping/>
+  </p:clrMapOvr>
+</p:sld>
+</file>
+
+<file path=ppt/slides/slide9.xml><?xml version="1.0" encoding="utf-8"?>
+<p:sld xmlns:a="http://schemas.openxmlformats.org/drawingml/2006/main" xmlns:p="http://schemas.openxmlformats.org/presentationml/2006/main" xmlns:r="http://schemas.openxmlformats.org/officeDocument/2006/relationships">
+  <p:cSld>
+    <p:spTree>
+      <p:nvGrpSpPr>
+        <p:cNvPr id="1" name=""/>
+        <p:cNvGrpSpPr/>
+        <p:nvPr/>
+      </p:nvGrpSpPr>
+      <p:grpSpPr/>
+      <p:sp>
+        <p:nvSpPr>
+          <p:cNvPr id="2" name="Rectangle 1"/>
+          <p:cNvSpPr/>
+          <p:nvPr/>
+        </p:nvSpPr>
+        <p:spPr>
+          <a:xfrm>
+            <a:off x="0" y="0"/>
+            <a:ext cx="12191695" cy="6858000"/>
+          </a:xfrm>
+          <a:prstGeom prst="rect">
+            <a:avLst/>
+          </a:prstGeom>
+          <a:solidFill>
+            <a:srgbClr val="090D16"/>
+          </a:solidFill>
+          <a:ln>
+            <a:noFill/>
+          </a:ln>
+        </p:spPr>
+        <p:style>
+          <a:lnRef idx="1">
+            <a:schemeClr val="accent1"/>
+          </a:lnRef>
+          <a:fillRef idx="3">
+            <a:schemeClr val="accent1"/>
+          </a:fillRef>
+          <a:effectRef idx="2">
+            <a:schemeClr val="accent1"/>
+          </a:effectRef>
+          <a:fontRef idx="minor">
+            <a:schemeClr val="lt1"/>
+          </a:fontRef>
+        </p:style>
+        <p:txBody>
+          <a:bodyPr rtlCol="0" anchor="ctr"/>
+          <a:lstStyle/>
+          <a:p>
+            <a:pPr algn="ctr"/>
+          </a:p>
+        </p:txBody>
+      </p:sp>
+      <p:sp>
+        <p:nvSpPr>
+          <p:cNvPr id="3" name="TextBox 2"/>
           <p:cNvSpPr txBox="1"/>
           <p:nvPr/>
         </p:nvSpPr>
         <p:spPr>
           <a:xfrm>
-            <a:off x="731520" y="1371600"/>
-            <a:ext cx="10698480" cy="5029200"/>
+            <a:off x="731520" y="365760"/>
+            <a:ext cx="10728655" cy="1005840"/>
           </a:xfrm>
           <a:prstGeom prst="rect">
             <a:avLst/>
@@ -4734,83 +8581,152 @@
           <a:lstStyle/>
           <a:p>
             <a:pPr>
-              <a:spcBef>
-                <a:spcPts val="1000"/>
-              </a:spcBef>
+              <a:defRPr sz="1100" b="1">
+                <a:solidFill>
+                  <a:srgbClr val="6366F1"/>
+                </a:solidFill>
+              </a:defRPr>
+            </a:pPr>
+            <a:r>
+              <a:t>SYSTEM VERIFICATION &amp; LIVE TELEMETRY • SLIDE 9</a:t>
+            </a:r>
+          </a:p>
+          <a:p>
+            <a:pPr>
+              <a:defRPr sz="2200" b="1">
+                <a:solidFill>
+                  <a:srgbClr val="F8FAFC"/>
+                </a:solidFill>
+              </a:defRPr>
+            </a:pPr>
+            <a:r>
+              <a:t>Live UI: Interactive Prediction &amp; Stylometry Console</a:t>
+            </a:r>
+          </a:p>
+        </p:txBody>
+      </p:sp>
+      <p:pic>
+        <p:nvPicPr>
+          <p:cNvPr id="4" name="Picture 3" descr="02_prediction_console.png"/>
+          <p:cNvPicPr>
+            <a:picLocks noChangeAspect="1"/>
+          </p:cNvPicPr>
+          <p:nvPr/>
+        </p:nvPicPr>
+        <p:blipFill>
+          <a:blip r:embed="rId2"/>
+          <a:stretch>
+            <a:fillRect/>
+          </a:stretch>
+        </p:blipFill>
+        <p:spPr>
+          <a:xfrm>
+            <a:off x="731520" y="1645920"/>
+            <a:ext cx="6949440" cy="4389120"/>
+          </a:xfrm>
+          <a:prstGeom prst="rect">
+            <a:avLst/>
+          </a:prstGeom>
+        </p:spPr>
+      </p:pic>
+      <p:sp>
+        <p:nvSpPr>
+          <p:cNvPr id="5" name="Rounded Rectangle 4"/>
+          <p:cNvSpPr/>
+          <p:nvPr/>
+        </p:nvSpPr>
+        <p:spPr>
+          <a:xfrm>
+            <a:off x="7955279" y="1645920"/>
+            <a:ext cx="3474720" cy="4389120"/>
+          </a:xfrm>
+          <a:prstGeom prst="roundRect">
+            <a:avLst/>
+          </a:prstGeom>
+          <a:solidFill>
+            <a:srgbClr val="111827"/>
+          </a:solidFill>
+          <a:ln w="19050">
+            <a:solidFill>
+              <a:srgbClr val="6366F1"/>
+            </a:solidFill>
+          </a:ln>
+        </p:spPr>
+        <p:style>
+          <a:lnRef idx="1">
+            <a:schemeClr val="accent1"/>
+          </a:lnRef>
+          <a:fillRef idx="3">
+            <a:schemeClr val="accent1"/>
+          </a:fillRef>
+          <a:effectRef idx="2">
+            <a:schemeClr val="accent1"/>
+          </a:effectRef>
+          <a:fontRef idx="minor">
+            <a:schemeClr val="lt1"/>
+          </a:fontRef>
+        </p:style>
+        <p:txBody>
+          <a:bodyPr rtlCol="0" anchor="ctr" wrap="square"/>
+          <a:lstStyle/>
+          <a:p>
+            <a:pPr algn="ctr">
               <a:defRPr sz="1500" b="1">
                 <a:solidFill>
-                  <a:srgbClr val="0F172A"/>
-                </a:solidFill>
-              </a:defRPr>
-            </a:pPr>
-            <a:r>
-              <a:t>■ Project Accomplishments</a:t>
-            </a:r>
-          </a:p>
-          <a:p>
-            <a:pPr>
-              <a:defRPr sz="1300">
-                <a:solidFill>
-                  <a:srgbClr val="475569"/>
-                </a:solidFill>
-              </a:defRPr>
-            </a:pPr>
-            <a:r>
-              <a:t>Engineered a robust, end-to-end prototype validating the initial abstract with reproducible experiments.</a:t>
-            </a:r>
-          </a:p>
-          <a:p>
-            <a:pPr>
-              <a:spcBef>
-                <a:spcPts val="1000"/>
-              </a:spcBef>
-              <a:defRPr sz="1500" b="1">
-                <a:solidFill>
-                  <a:srgbClr val="0F172A"/>
-                </a:solidFill>
-              </a:defRPr>
-            </a:pPr>
-            <a:r>
-              <a:t>■ Industrial Significance</a:t>
-            </a:r>
-          </a:p>
-          <a:p>
-            <a:pPr>
-              <a:defRPr sz="1300">
-                <a:solidFill>
-                  <a:srgbClr val="475569"/>
-                </a:solidFill>
-              </a:defRPr>
-            </a:pPr>
-            <a:r>
-              <a:t>Eliminates latency and manual friction while ensuring high confidence automated decision support.</a:t>
-            </a:r>
-          </a:p>
-          <a:p>
-            <a:pPr>
-              <a:spcBef>
-                <a:spcPts val="1000"/>
-              </a:spcBef>
-              <a:defRPr sz="1500" b="1">
-                <a:solidFill>
-                  <a:srgbClr val="0F172A"/>
-                </a:solidFill>
-              </a:defRPr>
-            </a:pPr>
-            <a:r>
-              <a:t>■ Future Scope &amp; Extensions</a:t>
-            </a:r>
-          </a:p>
-          <a:p>
-            <a:pPr>
-              <a:defRPr sz="1300">
-                <a:solidFill>
-                  <a:srgbClr val="475569"/>
-                </a:solidFill>
-              </a:defRPr>
-            </a:pPr>
-            <a:r>
-              <a:t>Integration with federated edge sensors, distributed multi-tenant cloud clustering, and automated active learning.</a:t>
+                  <a:srgbClr val="6366F1"/>
+                </a:solidFill>
+              </a:defRPr>
+            </a:pPr>
+            <a:r>
+              <a:t>Interactive Analysis Input</a:t>
+            </a:r>
+          </a:p>
+          <a:p>
+            <a:pPr>
+              <a:defRPr sz="1100">
+                <a:solidFill>
+                  <a:srgbClr val="94A3B8"/>
+                </a:solidFill>
+              </a:defRPr>
+            </a:pPr>
+            <a:r>
+              <a:t>• Clean multiline input textarea with real-time text analysis triggers.</a:t>
+            </a:r>
+          </a:p>
+          <a:p>
+            <a:pPr>
+              <a:defRPr sz="1100">
+                <a:solidFill>
+                  <a:srgbClr val="94A3B8"/>
+                </a:solidFill>
+              </a:defRPr>
+            </a:pPr>
+            <a:r>
+              <a:t>• Pure Language Mode toggle allows stripping of newsroom watermarks.</a:t>
+            </a:r>
+          </a:p>
+          <a:p>
+            <a:pPr>
+              <a:defRPr sz="1100">
+                <a:solidFill>
+                  <a:srgbClr val="94A3B8"/>
+                </a:solidFill>
+              </a:defRPr>
+            </a:pPr>
+            <a:r>
+              <a:t>• Quick Test Sample buttons: Real News, Sensational Fake, Clickbait, and Pure Headline.</a:t>
+            </a:r>
+          </a:p>
+          <a:p>
+            <a:pPr>
+              <a:defRPr sz="1100">
+                <a:solidFill>
+                  <a:srgbClr val="94A3B8"/>
+                </a:solidFill>
+              </a:defRPr>
+            </a:pPr>
+            <a:r>
+              <a:t>• Responsive submission workflow with instantaneous asynchronous inference.</a:t>
             </a:r>
           </a:p>
         </p:txBody>
